--- a/learning/P01_zephyr_make_project/slides/P007_Zephyr应用构建_Windows.pptx
+++ b/learning/P01_zephyr_make_project/slides/P007_Zephyr应用构建_Windows.pptx
@@ -33,6 +33,7 @@
     <p:sldId id="269" r:id="rIdLesson14"/>
     <p:sldId id="270" r:id="rIdLesson15"/>
     <p:sldId id="271" r:id="rIdLesson16"/>
+    <p:sldId id="273" r:id="rIdFirmwareFormats"/>
     <p:sldId id="272" r:id="rIdLesson17"/>
   </p:sldIdLst>
   <p:sldSz cx="12192000" cy="6858000"/>
@@ -312,6 +313,83 @@
     </a:lvl1pPr>
   </p:notesStyle>
 </p:notesMaster>
+</file>
+
+<file path=ppt/notesSlides/firmware_formats.xml><?xml version="1.0" encoding="utf-8"?>
+<p:notes xmlns:a="http://schemas.openxmlformats.org/drawingml/2006/main" xmlns:r="http://schemas.openxmlformats.org/officeDocument/2006/relationships" xmlns:p="http://schemas.openxmlformats.org/presentationml/2006/main">
+  <p:cSld>
+    <p:spTree>
+      <p:nvGrpSpPr>
+        <p:cNvPr id="1" name=""/>
+        <p:cNvGrpSpPr/>
+        <p:nvPr/>
+      </p:nvGrpSpPr>
+      <p:grpSpPr>
+        <a:xfrm>
+          <a:off x="0" y="0"/>
+          <a:ext cx="0" cy="0"/>
+          <a:chOff x="0" y="0"/>
+          <a:chExt cx="0" cy="0"/>
+        </a:xfrm>
+      </p:grpSpPr>
+      <p:sp>
+        <p:nvSpPr>
+          <p:cNvPr id="2" name="Slide Image Placeholder 1"/>
+          <p:cNvSpPr>
+            <a:spLocks noGrp="1" noRot="1" noChangeAspect="1"/>
+          </p:cNvSpPr>
+          <p:nvPr>
+            <p:ph type="sldImg"/>
+          </p:nvPr>
+        </p:nvSpPr>
+        <p:spPr/>
+      </p:sp>
+      <p:sp>
+        <p:nvSpPr>
+          <p:cNvPr id="3" name="Notes Placeholder 2"/>
+          <p:cNvSpPr>
+            <a:spLocks noGrp="1"/>
+          </p:cNvSpPr>
+          <p:nvPr>
+            <p:ph type="body" idx="1"/>
+          </p:nvPr>
+        </p:nvSpPr>
+        <p:spPr/>
+        <p:txBody>
+          <a:bodyPr/>
+          <a:lstStyle/>
+          <a:p>
+            <a:r>
+              <a:t>对应正文：P007_Zephyr应用构建_Windows.md#firmware-formats。构建先链接 ELF，再由 Kconfig 的 BUILD_OUTPUT_HEX/BIN 和根 CMakeLists.txt 安排派生产物。ELF 是否有 DWARF 取决于调试信息配置。BIN 本身没有加载地址。不能用 MPS2 文件烧录 HC32。</a:t>
+            </a:r>
+          </a:p>
+        </p:txBody>
+      </p:sp>
+      <p:sp>
+        <p:nvSpPr>
+          <p:cNvPr id="4" name="Slide Number Placeholder 3"/>
+          <p:cNvSpPr>
+            <a:spLocks noGrp="1"/>
+          </p:cNvSpPr>
+          <p:nvPr>
+            <p:ph type="sldNum" idx="5"/>
+          </p:nvPr>
+        </p:nvSpPr>
+        <p:spPr/>
+        <p:txBody>
+          <a:bodyPr/>
+          <a:lstStyle/>
+          <a:p>
+            <a:endParaRPr/>
+          </a:p>
+        </p:txBody>
+      </p:sp>
+    </p:spTree>
+  </p:cSld>
+  <p:clrMapOvr>
+    <a:masterClrMapping/>
+  </p:clrMapOvr>
+</p:notes>
 </file>
 
 <file path=ppt/notesSlides/lesson_7_1.xml><?xml version="1.0" encoding="utf-8"?>
@@ -22877,6 +22955,956 @@
 </p:sldMaster>
 </file>
 
+<file path=ppt/slides/firmware_formats.xml><?xml version="1.0" encoding="utf-8"?>
+<p:sld xmlns:a="http://schemas.openxmlformats.org/drawingml/2006/main" xmlns:r="http://schemas.openxmlformats.org/officeDocument/2006/relationships" xmlns:p="http://schemas.openxmlformats.org/presentationml/2006/main">
+  <p:cSld>
+    <p:bg>
+      <p:bgPr>
+        <a:solidFill>
+          <a:srgbClr val="FFFFFF"/>
+        </a:solidFill>
+        <a:effectLst/>
+      </p:bgPr>
+    </p:bg>
+    <p:spTree>
+      <p:nvGrpSpPr>
+        <p:cNvPr id="1" name=""/>
+        <p:cNvGrpSpPr/>
+        <p:nvPr/>
+      </p:nvGrpSpPr>
+      <p:grpSpPr>
+        <a:xfrm>
+          <a:off x="0" y="0"/>
+          <a:ext cx="0" cy="0"/>
+          <a:chOff x="0" y="0"/>
+          <a:chExt cx="0" cy="0"/>
+        </a:xfrm>
+      </p:grpSpPr>
+      <p:cxnSp>
+        <p:nvCxnSpPr>
+          <p:cNvPr id="7" name="">
+            <a:extLst>
+              <a:ext uri="{FF2B5EF4-FFF2-40B4-BE49-F238E27FC236}">
+                <a16:creationId xmlns:a16="http://schemas.microsoft.com/office/drawing/2014/main" id="{E74BB42B-9BC5-425C-ADEA-A0E7DBBF41C4}"/>
+              </a:ext>
+            </a:extLst>
+          </p:cNvPr>
+          <p:cNvCxnSpPr>
+            <a:stCxn id="4" idx="3"/>
+            <a:endCxn id="5" idx="1"/>
+          </p:cNvCxnSpPr>
+          <p:nvPr/>
+        </p:nvCxnSpPr>
+        <p:spPr>
+          <a:xfrm>
+            <a:off x="7829550" y="2333625"/>
+            <a:ext cx="285750" cy="0"/>
+          </a:xfrm>
+          <a:prstGeom prst="straightConnector1">
+            <a:avLst/>
+          </a:prstGeom>
+          <a:ln w="14288">
+            <a:solidFill>
+              <a:srgbClr val="7756AD"/>
+            </a:solidFill>
+            <a:tailEnd type="triangle" w="med" len="med"/>
+          </a:ln>
+        </p:spPr>
+      </p:cxnSp>
+      <p:cxnSp>
+        <p:nvCxnSpPr>
+          <p:cNvPr id="6" name="">
+            <a:extLst>
+              <a:ext uri="{FF2B5EF4-FFF2-40B4-BE49-F238E27FC236}">
+                <a16:creationId xmlns:a16="http://schemas.microsoft.com/office/drawing/2014/main" id="{88BB5AB7-F69E-4A07-AC01-022D1F406A3F}"/>
+              </a:ext>
+            </a:extLst>
+          </p:cNvPr>
+          <p:cNvCxnSpPr>
+            <a:stCxn id="3" idx="3"/>
+            <a:endCxn id="4" idx="1"/>
+          </p:cNvCxnSpPr>
+          <p:nvPr/>
+        </p:nvCxnSpPr>
+        <p:spPr>
+          <a:xfrm>
+            <a:off x="4076700" y="2333625"/>
+            <a:ext cx="285750" cy="0"/>
+          </a:xfrm>
+          <a:prstGeom prst="straightConnector1">
+            <a:avLst/>
+          </a:prstGeom>
+          <a:ln w="14288">
+            <a:solidFill>
+              <a:srgbClr val="7756AD"/>
+            </a:solidFill>
+            <a:tailEnd type="triangle" w="med" len="med"/>
+          </a:ln>
+        </p:spPr>
+      </p:cxnSp>
+      <p:sp>
+        <p:nvSpPr>
+          <p:cNvPr id="12" name="Title">
+            <a:extLst>
+              <a:ext uri="{FF2B5EF4-FFF2-40B4-BE49-F238E27FC236}">
+                <a16:creationId xmlns:a16="http://schemas.microsoft.com/office/drawing/2014/main" id="{9A9F516C-5C5C-4296-B403-D6F7C9FCD2F4}"/>
+              </a:ext>
+            </a:extLst>
+          </p:cNvPr>
+          <p:cNvSpPr>
+            <a:spLocks noGrp="1"/>
+          </p:cNvSpPr>
+          <p:nvPr/>
+        </p:nvSpPr>
+        <p:spPr>
+          <a:xfrm>
+            <a:off x="609600" y="400050"/>
+            <a:ext cx="10972800" cy="666750"/>
+          </a:xfrm>
+          <a:prstGeom prst="rect">
+            <a:avLst/>
+          </a:prstGeom>
+          <a:noFill/>
+          <a:ln w="0">
+            <a:noFill/>
+          </a:ln>
+        </p:spPr>
+        <p:txBody>
+          <a:bodyPr lIns="0" rIns="0" tIns="0" bIns="0">
+            <a:noAutofit/>
+          </a:bodyPr>
+          <a:lstStyle>
+            <a:defPPr>
+              <a:defRPr sz="3000" b="1">
+                <a:solidFill>
+                  <a:srgbClr val="29263B"/>
+                </a:solidFill>
+                <a:latin typeface="Microsoft YaHei"/>
+                <a:ea typeface="Microsoft YaHei"/>
+                <a:cs typeface="Microsoft YaHei"/>
+              </a:defRPr>
+            </a:defPPr>
+          </a:lstStyle>
+          <a:p>
+            <a:pPr>
+              <a:lnSpc>
+                <a:spcPct val="120000"/>
+              </a:lnSpc>
+              <a:spcAft>
+                <a:spcPts val="0"/>
+              </a:spcAft>
+              <a:defRPr sz="3000" b="1">
+                <a:solidFill>
+                  <a:srgbClr val="29263B"/>
+                </a:solidFill>
+                <a:latin typeface="Microsoft YaHei"/>
+                <a:ea typeface="Microsoft YaHei"/>
+                <a:cs typeface="Microsoft YaHei"/>
+              </a:defRPr>
+            </a:pPr>
+            <a:r>
+              <a:t>ELF 是链接产物，HEX / BIN 按配置派生</a:t>
+            </a:r>
+          </a:p>
+        </p:txBody>
+      </p:sp>
+      <p:sp>
+        <p:nvSpPr>
+          <p:cNvPr id="2" name="Stage">
+            <a:extLst>
+              <a:ext uri="{FF2B5EF4-FFF2-40B4-BE49-F238E27FC236}">
+                <a16:creationId xmlns:a16="http://schemas.microsoft.com/office/drawing/2014/main" id="{E2A528CD-FA21-46EC-9CA1-856DF6D7A6D8}"/>
+              </a:ext>
+            </a:extLst>
+          </p:cNvPr>
+          <p:cNvSpPr>
+            <a:spLocks noGrp="1"/>
+          </p:cNvSpPr>
+          <p:nvPr/>
+        </p:nvSpPr>
+        <p:spPr>
+          <a:xfrm>
+            <a:off x="609600" y="1200150"/>
+            <a:ext cx="10972800" cy="342900"/>
+          </a:xfrm>
+          <a:prstGeom prst="rect">
+            <a:avLst/>
+          </a:prstGeom>
+          <a:noFill/>
+          <a:ln w="0">
+            <a:noFill/>
+          </a:ln>
+        </p:spPr>
+        <p:txBody>
+          <a:bodyPr lIns="0" rIns="0" tIns="0" bIns="0">
+            <a:noAutofit/>
+          </a:bodyPr>
+          <a:lstStyle>
+            <a:defPPr>
+              <a:defRPr sz="1575" b="0">
+                <a:solidFill>
+                  <a:srgbClr val="6845AC"/>
+                </a:solidFill>
+                <a:latin typeface="Microsoft YaHei"/>
+                <a:ea typeface="Microsoft YaHei"/>
+                <a:cs typeface="Microsoft YaHei"/>
+              </a:defRPr>
+            </a:defPPr>
+          </a:lstStyle>
+          <a:p>
+            <a:pPr>
+              <a:lnSpc>
+                <a:spcPct val="120000"/>
+              </a:lnSpc>
+              <a:spcAft>
+                <a:spcPts val="0"/>
+              </a:spcAft>
+              <a:defRPr sz="1575" b="0">
+                <a:solidFill>
+                  <a:srgbClr val="6845AC"/>
+                </a:solidFill>
+                <a:latin typeface="Microsoft YaHei"/>
+                <a:ea typeface="Microsoft YaHei"/>
+                <a:cs typeface="Microsoft YaHei"/>
+              </a:defRPr>
+            </a:pPr>
+            <a:r>
+              <a:t>7.2.3.1 · 构建成功后，核对本次输出</a:t>
+            </a:r>
+          </a:p>
+        </p:txBody>
+      </p:sp>
+      <p:sp>
+        <p:nvSpPr>
+          <p:cNvPr id="3" name="Pipeline 0">
+            <a:extLst>
+              <a:ext uri="{FF2B5EF4-FFF2-40B4-BE49-F238E27FC236}">
+                <a16:creationId xmlns:a16="http://schemas.microsoft.com/office/drawing/2014/main" id="{9F974D83-DBCC-4A58-8331-9F670E3CE818}"/>
+              </a:ext>
+            </a:extLst>
+          </p:cNvPr>
+          <p:cNvSpPr>
+            <a:spLocks noGrp="1"/>
+          </p:cNvSpPr>
+          <p:nvPr/>
+        </p:nvSpPr>
+        <p:spPr>
+          <a:xfrm>
+            <a:off x="609600" y="1924050"/>
+            <a:ext cx="3467100" cy="819150"/>
+          </a:xfrm>
+          <a:prstGeom prst="rect">
+            <a:avLst/>
+          </a:prstGeom>
+          <a:solidFill>
+            <a:srgbClr val="F1EDF7"/>
+          </a:solidFill>
+          <a:ln w="14288">
+            <a:solidFill>
+              <a:srgbClr val="7756AD"/>
+            </a:solidFill>
+          </a:ln>
+        </p:spPr>
+        <p:txBody>
+          <a:bodyPr anchor="ctr" lIns="0" rIns="0" tIns="0" bIns="0">
+            <a:noAutofit/>
+          </a:bodyPr>
+          <a:lstStyle>
+            <a:defPPr algn="ctr">
+              <a:defRPr sz="1950">
+                <a:solidFill>
+                  <a:srgbClr val="29263B"/>
+                </a:solidFill>
+                <a:latin typeface="Microsoft YaHei"/>
+                <a:ea typeface="Microsoft YaHei"/>
+                <a:cs typeface="Microsoft YaHei"/>
+              </a:defRPr>
+            </a:defPPr>
+          </a:lstStyle>
+          <a:p>
+            <a:pPr algn="ctr">
+              <a:lnSpc>
+                <a:spcPct val="120000"/>
+              </a:lnSpc>
+              <a:defRPr sz="1950">
+                <a:solidFill>
+                  <a:srgbClr val="29263B"/>
+                </a:solidFill>
+                <a:latin typeface="Microsoft YaHei"/>
+                <a:ea typeface="Microsoft YaHei"/>
+                <a:cs typeface="Microsoft YaHei"/>
+              </a:defRPr>
+            </a:pPr>
+            <a:r>
+              <a:rPr sz="1950">
+                <a:solidFill>
+                  <a:srgbClr val="29263B"/>
+                </a:solidFill>
+                <a:latin typeface="Microsoft YaHei"/>
+                <a:ea typeface="Microsoft YaHei"/>
+                <a:cs typeface="Microsoft YaHei"/>
+              </a:rPr>
+              <a:t>源码 → 目标文件 / 库</a:t>
+            </a:r>
+          </a:p>
+        </p:txBody>
+      </p:sp>
+      <p:sp>
+        <p:nvSpPr>
+          <p:cNvPr id="4" name="Pipeline 1">
+            <a:extLst>
+              <a:ext uri="{FF2B5EF4-FFF2-40B4-BE49-F238E27FC236}">
+                <a16:creationId xmlns:a16="http://schemas.microsoft.com/office/drawing/2014/main" id="{4C5B4247-6F9F-4768-B36B-CE6F99EEF1E7}"/>
+              </a:ext>
+            </a:extLst>
+          </p:cNvPr>
+          <p:cNvSpPr>
+            <a:spLocks noGrp="1"/>
+          </p:cNvSpPr>
+          <p:nvPr/>
+        </p:nvSpPr>
+        <p:spPr>
+          <a:xfrm>
+            <a:off x="4362450" y="1924050"/>
+            <a:ext cx="3467100" cy="819150"/>
+          </a:xfrm>
+          <a:prstGeom prst="rect">
+            <a:avLst/>
+          </a:prstGeom>
+          <a:solidFill>
+            <a:srgbClr val="F1EDF7"/>
+          </a:solidFill>
+          <a:ln w="14288">
+            <a:solidFill>
+              <a:srgbClr val="7756AD"/>
+            </a:solidFill>
+          </a:ln>
+        </p:spPr>
+        <p:txBody>
+          <a:bodyPr anchor="ctr" lIns="0" rIns="0" tIns="0" bIns="0">
+            <a:noAutofit/>
+          </a:bodyPr>
+          <a:lstStyle>
+            <a:defPPr algn="ctr">
+              <a:defRPr sz="1950">
+                <a:solidFill>
+                  <a:srgbClr val="29263B"/>
+                </a:solidFill>
+                <a:latin typeface="Microsoft YaHei"/>
+                <a:ea typeface="Microsoft YaHei"/>
+                <a:cs typeface="Microsoft YaHei"/>
+              </a:defRPr>
+            </a:defPPr>
+          </a:lstStyle>
+          <a:p>
+            <a:pPr algn="ctr">
+              <a:lnSpc>
+                <a:spcPct val="120000"/>
+              </a:lnSpc>
+              <a:defRPr sz="1950">
+                <a:solidFill>
+                  <a:srgbClr val="29263B"/>
+                </a:solidFill>
+                <a:latin typeface="Microsoft YaHei"/>
+                <a:ea typeface="Microsoft YaHei"/>
+                <a:cs typeface="Microsoft YaHei"/>
+              </a:defRPr>
+            </a:pPr>
+            <a:r>
+              <a:rPr sz="1950">
+                <a:solidFill>
+                  <a:srgbClr val="29263B"/>
+                </a:solidFill>
+                <a:latin typeface="Microsoft YaHei"/>
+                <a:ea typeface="Microsoft YaHei"/>
+                <a:cs typeface="Microsoft YaHei"/>
+              </a:rPr>
+              <a:t>链接 → zephyr.elf</a:t>
+            </a:r>
+          </a:p>
+        </p:txBody>
+      </p:sp>
+      <p:sp>
+        <p:nvSpPr>
+          <p:cNvPr id="5" name="Pipeline 2">
+            <a:extLst>
+              <a:ext uri="{FF2B5EF4-FFF2-40B4-BE49-F238E27FC236}">
+                <a16:creationId xmlns:a16="http://schemas.microsoft.com/office/drawing/2014/main" id="{6DB165A1-AAC5-4651-8972-317FAC4BE079}"/>
+              </a:ext>
+            </a:extLst>
+          </p:cNvPr>
+          <p:cNvSpPr>
+            <a:spLocks noGrp="1"/>
+          </p:cNvSpPr>
+          <p:nvPr/>
+        </p:nvSpPr>
+        <p:spPr>
+          <a:xfrm>
+            <a:off x="8115300" y="1924050"/>
+            <a:ext cx="3467100" cy="819150"/>
+          </a:xfrm>
+          <a:prstGeom prst="rect">
+            <a:avLst/>
+          </a:prstGeom>
+          <a:solidFill>
+            <a:srgbClr val="F1EDF7"/>
+          </a:solidFill>
+          <a:ln w="14288">
+            <a:solidFill>
+              <a:srgbClr val="7756AD"/>
+            </a:solidFill>
+          </a:ln>
+        </p:spPr>
+        <p:txBody>
+          <a:bodyPr anchor="ctr" lIns="0" rIns="0" tIns="0" bIns="0">
+            <a:noAutofit/>
+          </a:bodyPr>
+          <a:lstStyle>
+            <a:defPPr algn="ctr">
+              <a:defRPr sz="1950">
+                <a:solidFill>
+                  <a:srgbClr val="29263B"/>
+                </a:solidFill>
+                <a:latin typeface="Microsoft YaHei"/>
+                <a:ea typeface="Microsoft YaHei"/>
+                <a:cs typeface="Microsoft YaHei"/>
+              </a:defRPr>
+            </a:defPPr>
+          </a:lstStyle>
+          <a:p>
+            <a:pPr algn="ctr">
+              <a:lnSpc>
+                <a:spcPct val="120000"/>
+              </a:lnSpc>
+              <a:defRPr sz="1950">
+                <a:solidFill>
+                  <a:srgbClr val="29263B"/>
+                </a:solidFill>
+                <a:latin typeface="Microsoft YaHei"/>
+                <a:ea typeface="Microsoft YaHei"/>
+                <a:cs typeface="Microsoft YaHei"/>
+              </a:defRPr>
+            </a:pPr>
+            <a:r>
+              <a:rPr sz="1950">
+                <a:solidFill>
+                  <a:srgbClr val="29263B"/>
+                </a:solidFill>
+                <a:latin typeface="Microsoft YaHei"/>
+                <a:ea typeface="Microsoft YaHei"/>
+                <a:cs typeface="Microsoft YaHei"/>
+              </a:rPr>
+              <a:t>按配置 → HEX / BIN</a:t>
+            </a:r>
+          </a:p>
+        </p:txBody>
+      </p:sp>
+      <p:sp>
+        <p:nvSpPr>
+          <p:cNvPr id="8" name="Formats">
+            <a:extLst>
+              <a:ext uri="{FF2B5EF4-FFF2-40B4-BE49-F238E27FC236}">
+                <a16:creationId xmlns:a16="http://schemas.microsoft.com/office/drawing/2014/main" id="{4ED194D4-54A4-4C30-975A-D99D800DA5F6}"/>
+              </a:ext>
+            </a:extLst>
+          </p:cNvPr>
+          <p:cNvSpPr>
+            <a:spLocks noGrp="1"/>
+          </p:cNvSpPr>
+          <p:nvPr/>
+        </p:nvSpPr>
+        <p:spPr>
+          <a:xfrm>
+            <a:off x="609600" y="3086100"/>
+            <a:ext cx="10972800" cy="1333500"/>
+          </a:xfrm>
+          <a:prstGeom prst="rect">
+            <a:avLst/>
+          </a:prstGeom>
+          <a:noFill/>
+          <a:ln w="0">
+            <a:noFill/>
+          </a:ln>
+        </p:spPr>
+        <p:txBody>
+          <a:bodyPr lIns="0" rIns="0" tIns="0" bIns="0">
+            <a:noAutofit/>
+          </a:bodyPr>
+          <a:lstStyle>
+            <a:defPPr>
+              <a:defRPr sz="2100" b="0">
+                <a:solidFill>
+                  <a:srgbClr val="29263B"/>
+                </a:solidFill>
+                <a:latin typeface="Microsoft YaHei"/>
+                <a:ea typeface="Microsoft YaHei"/>
+                <a:cs typeface="Microsoft YaHei"/>
+              </a:defRPr>
+            </a:defPPr>
+          </a:lstStyle>
+          <a:p>
+            <a:pPr>
+              <a:lnSpc>
+                <a:spcPct val="120000"/>
+              </a:lnSpc>
+              <a:spcAft>
+                <a:spcPts val="0"/>
+              </a:spcAft>
+              <a:defRPr sz="2100" b="0">
+                <a:solidFill>
+                  <a:srgbClr val="29263B"/>
+                </a:solidFill>
+                <a:latin typeface="Microsoft YaHei"/>
+                <a:ea typeface="Microsoft YaHei"/>
+                <a:cs typeface="Microsoft YaHei"/>
+              </a:defRPr>
+            </a:pPr>
+            <a:r>
+              <a:rPr>
+                <a:solidFill>
+                  <a:srgbClr val="0070C0"/>
+                </a:solidFill>
+              </a:rPr>
+              <a:t>zephyr.elf</a:t>
+            </a:r>
+            <a:r>
+              <a:t>：含加载段、符号；启用的调试信息供 GDB 使用。</a:t>
+            </a:r>
+          </a:p>
+          <a:p>
+            <a:pPr>
+              <a:lnSpc>
+                <a:spcPct val="120000"/>
+              </a:lnSpc>
+              <a:spcAft>
+                <a:spcPts val="0"/>
+              </a:spcAft>
+              <a:defRPr sz="2100" b="0">
+                <a:solidFill>
+                  <a:srgbClr val="29263B"/>
+                </a:solidFill>
+                <a:latin typeface="Microsoft YaHei"/>
+                <a:ea typeface="Microsoft YaHei"/>
+                <a:cs typeface="Microsoft YaHei"/>
+              </a:defRPr>
+            </a:pPr>
+            <a:r>
+              <a:rPr>
+                <a:solidFill>
+                  <a:srgbClr val="0070C0"/>
+                </a:solidFill>
+              </a:rPr>
+              <a:t>zephyr.hex</a:t>
+            </a:r>
+            <a:r>
+              <a:t>：Intel HEX 地址与数据记录。</a:t>
+            </a:r>
+          </a:p>
+          <a:p>
+            <a:pPr>
+              <a:lnSpc>
+                <a:spcPct val="120000"/>
+              </a:lnSpc>
+              <a:spcAft>
+                <a:spcPts val="0"/>
+              </a:spcAft>
+              <a:defRPr sz="2100" b="0">
+                <a:solidFill>
+                  <a:srgbClr val="29263B"/>
+                </a:solidFill>
+                <a:latin typeface="Microsoft YaHei"/>
+                <a:ea typeface="Microsoft YaHei"/>
+                <a:cs typeface="Microsoft YaHei"/>
+              </a:defRPr>
+            </a:pPr>
+            <a:r>
+              <a:rPr>
+                <a:solidFill>
+                  <a:srgbClr val="0070C0"/>
+                </a:solidFill>
+              </a:rPr>
+              <a:t>zephyr.bin</a:t>
+            </a:r>
+            <a:r>
+              <a:t>：裸数据；写入地址由板 / runner / 工具参数提供。</a:t>
+            </a:r>
+          </a:p>
+        </p:txBody>
+      </p:sp>
+      <p:sp>
+        <p:nvSpPr>
+          <p:cNvPr id="9" name="Configuration">
+            <a:extLst>
+              <a:ext uri="{FF2B5EF4-FFF2-40B4-BE49-F238E27FC236}">
+                <a16:creationId xmlns:a16="http://schemas.microsoft.com/office/drawing/2014/main" id="{ECBB42FD-800A-4850-BDED-C41AE13448A5}"/>
+              </a:ext>
+            </a:extLst>
+          </p:cNvPr>
+          <p:cNvSpPr>
+            <a:spLocks noGrp="1"/>
+          </p:cNvSpPr>
+          <p:nvPr/>
+        </p:nvSpPr>
+        <p:spPr>
+          <a:xfrm>
+            <a:off x="609600" y="4724400"/>
+            <a:ext cx="10972800" cy="1085850"/>
+          </a:xfrm>
+          <a:prstGeom prst="rect">
+            <a:avLst/>
+          </a:prstGeom>
+          <a:noFill/>
+          <a:ln w="0">
+            <a:noFill/>
+          </a:ln>
+        </p:spPr>
+        <p:txBody>
+          <a:bodyPr lIns="0" rIns="0" tIns="0" bIns="0">
+            <a:noAutofit/>
+          </a:bodyPr>
+          <a:lstStyle>
+            <a:defPPr>
+              <a:defRPr sz="1875" b="0">
+                <a:solidFill>
+                  <a:srgbClr val="29263B"/>
+                </a:solidFill>
+                <a:latin typeface="Microsoft YaHei"/>
+                <a:ea typeface="Microsoft YaHei"/>
+                <a:cs typeface="Microsoft YaHei"/>
+              </a:defRPr>
+            </a:defPPr>
+          </a:lstStyle>
+          <a:p>
+            <a:pPr>
+              <a:lnSpc>
+                <a:spcPct val="120000"/>
+              </a:lnSpc>
+              <a:spcAft>
+                <a:spcPts val="0"/>
+              </a:spcAft>
+              <a:defRPr sz="1875" b="0">
+                <a:solidFill>
+                  <a:srgbClr val="29263B"/>
+                </a:solidFill>
+                <a:latin typeface="Microsoft YaHei"/>
+                <a:ea typeface="Microsoft YaHei"/>
+                <a:cs typeface="Microsoft YaHei"/>
+              </a:defRPr>
+            </a:pPr>
+            <a:r>
+              <a:rPr>
+                <a:solidFill>
+                  <a:srgbClr val="B84E00"/>
+                </a:solidFill>
+              </a:rPr>
+              <a:t>CONFIG_BUILD_OUTPUT_HEX</a:t>
+            </a:r>
+            <a:r>
+              <a:t> / </a:t>
+            </a:r>
+            <a:r>
+              <a:rPr>
+                <a:solidFill>
+                  <a:srgbClr val="B84E00"/>
+                </a:solidFill>
+              </a:rPr>
+              <a:t>CONFIG_BUILD_OUTPUT_BIN</a:t>
+            </a:r>
+            <a:r>
+              <a:t> 控制派生格式。</a:t>
+            </a:r>
+          </a:p>
+          <a:p>
+            <a:pPr>
+              <a:lnSpc>
+                <a:spcPct val="120000"/>
+              </a:lnSpc>
+              <a:spcAft>
+                <a:spcPts val="0"/>
+              </a:spcAft>
+              <a:defRPr sz="1875" b="0">
+                <a:solidFill>
+                  <a:srgbClr val="29263B"/>
+                </a:solidFill>
+                <a:latin typeface="Microsoft YaHei"/>
+                <a:ea typeface="Microsoft YaHei"/>
+                <a:cs typeface="Microsoft YaHei"/>
+              </a:defRPr>
+            </a:pPr>
+            <a:r>
+              <a:t>查看构建目录的 </a:t>
+            </a:r>
+            <a:r>
+              <a:rPr>
+                <a:solidFill>
+                  <a:srgbClr val="0070C0"/>
+                </a:solidFill>
+              </a:rPr>
+              <a:t>zephyr/.config</a:t>
+            </a:r>
+            <a:r>
+              <a:t>；芯片型号不直接决定文件格式。</a:t>
+            </a:r>
+          </a:p>
+          <a:p>
+            <a:pPr>
+              <a:lnSpc>
+                <a:spcPct val="120000"/>
+              </a:lnSpc>
+              <a:spcAft>
+                <a:spcPts val="0"/>
+              </a:spcAft>
+              <a:defRPr sz="1875" b="0">
+                <a:solidFill>
+                  <a:srgbClr val="29263B"/>
+                </a:solidFill>
+                <a:latin typeface="Microsoft YaHei"/>
+                <a:ea typeface="Microsoft YaHei"/>
+                <a:cs typeface="Microsoft YaHei"/>
+              </a:defRPr>
+            </a:pPr>
+            <a:r>
+              <a:t>本页只核对产物，烧录格式由具体 runner 选择。</a:t>
+            </a:r>
+          </a:p>
+        </p:txBody>
+      </p:sp>
+      <p:sp>
+        <p:nvSpPr>
+          <p:cNvPr id="10" name="Source">
+            <a:extLst>
+              <a:ext uri="{FF2B5EF4-FFF2-40B4-BE49-F238E27FC236}">
+                <a16:creationId xmlns:a16="http://schemas.microsoft.com/office/drawing/2014/main" id="{22CDF416-B8E0-4146-9325-44B0807F9702}"/>
+              </a:ext>
+            </a:extLst>
+          </p:cNvPr>
+          <p:cNvSpPr>
+            <a:spLocks noGrp="1"/>
+          </p:cNvSpPr>
+          <p:nvPr/>
+        </p:nvSpPr>
+        <p:spPr>
+          <a:xfrm>
+            <a:off x="609600" y="5905500"/>
+            <a:ext cx="10972800" cy="238125"/>
+          </a:xfrm>
+          <a:prstGeom prst="rect">
+            <a:avLst/>
+          </a:prstGeom>
+          <a:noFill/>
+          <a:ln w="0">
+            <a:noFill/>
+          </a:ln>
+        </p:spPr>
+        <p:txBody>
+          <a:bodyPr lIns="0" rIns="0" tIns="0" bIns="0">
+            <a:noAutofit/>
+          </a:bodyPr>
+          <a:lstStyle>
+            <a:defPPr>
+              <a:defRPr sz="1200" b="0">
+                <a:solidFill>
+                  <a:srgbClr val="29263B"/>
+                </a:solidFill>
+                <a:latin typeface="Microsoft YaHei"/>
+                <a:ea typeface="Microsoft YaHei"/>
+                <a:cs typeface="Microsoft YaHei"/>
+              </a:defRPr>
+            </a:defPPr>
+          </a:lstStyle>
+          <a:p>
+            <a:pPr>
+              <a:lnSpc>
+                <a:spcPct val="120000"/>
+              </a:lnSpc>
+              <a:spcAft>
+                <a:spcPts val="0"/>
+              </a:spcAft>
+              <a:defRPr sz="1200" b="0">
+                <a:solidFill>
+                  <a:srgbClr val="29263B"/>
+                </a:solidFill>
+                <a:latin typeface="Microsoft YaHei"/>
+                <a:ea typeface="Microsoft YaHei"/>
+                <a:cs typeface="Microsoft YaHei"/>
+              </a:defRPr>
+            </a:pPr>
+            <a:r>
+              <a:rPr u="sng">
+                <a:solidFill>
+                  <a:srgbClr val="397589"/>
+                </a:solidFill>
+                <a:hlinkClick r:id="R58b8de9fee2f41a6"/>
+              </a:rPr>
+              <a:t>依据：Kconfig.zephyr 的 BUILD_OUTPUT_*；根 CMakeLists.txt</a:t>
+            </a:r>
+          </a:p>
+        </p:txBody>
+      </p:sp>
+      <p:sp>
+        <p:nvSpPr>
+          <p:cNvPr id="11" name="Links">
+            <a:extLst>
+              <a:ext uri="{FF2B5EF4-FFF2-40B4-BE49-F238E27FC236}">
+                <a16:creationId xmlns:a16="http://schemas.microsoft.com/office/drawing/2014/main" id="{68C3577D-779B-420F-8657-61F7C95B56F5}"/>
+              </a:ext>
+            </a:extLst>
+          </p:cNvPr>
+          <p:cNvSpPr>
+            <a:spLocks noGrp="1"/>
+          </p:cNvSpPr>
+          <p:nvPr/>
+        </p:nvSpPr>
+        <p:spPr>
+          <a:xfrm>
+            <a:off x="609600" y="6191250"/>
+            <a:ext cx="10972800" cy="219075"/>
+          </a:xfrm>
+          <a:prstGeom prst="rect">
+            <a:avLst/>
+          </a:prstGeom>
+          <a:noFill/>
+          <a:ln w="0">
+            <a:noFill/>
+          </a:ln>
+        </p:spPr>
+        <p:txBody>
+          <a:bodyPr lIns="0" rIns="0" tIns="0" bIns="0">
+            <a:noAutofit/>
+          </a:bodyPr>
+          <a:lstStyle>
+            <a:defPPr>
+              <a:defRPr sz="1200" b="0">
+                <a:solidFill>
+                  <a:srgbClr val="29263B"/>
+                </a:solidFill>
+                <a:latin typeface="Microsoft YaHei"/>
+                <a:ea typeface="Microsoft YaHei"/>
+                <a:cs typeface="Microsoft YaHei"/>
+              </a:defRPr>
+            </a:defPPr>
+          </a:lstStyle>
+          <a:p>
+            <a:pPr>
+              <a:lnSpc>
+                <a:spcPct val="120000"/>
+              </a:lnSpc>
+              <a:spcAft>
+                <a:spcPts val="0"/>
+              </a:spcAft>
+              <a:defRPr sz="1200" b="0">
+                <a:solidFill>
+                  <a:srgbClr val="29263B"/>
+                </a:solidFill>
+                <a:latin typeface="Microsoft YaHei"/>
+                <a:ea typeface="Microsoft YaHei"/>
+                <a:cs typeface="Microsoft YaHei"/>
+              </a:defRPr>
+            </a:pPr>
+            <a:r>
+              <a:rPr u="sng">
+                <a:solidFill>
+                  <a:srgbClr val="397589"/>
+                </a:solidFill>
+                <a:hlinkClick r:id="R7f70a22e877549dd"/>
+              </a:rPr>
+              <a:t>完整检查命令</a:t>
+            </a:r>
+          </a:p>
+        </p:txBody>
+      </p:sp>
+      <p:sp>
+        <p:nvSpPr>
+          <p:cNvPr id="900" name="PageNumber">
+            <a:extLst>
+              <a:ext uri="{FF2B5EF4-FFF2-40B4-BE49-F238E27FC236}">
+                <a16:creationId xmlns:a16="http://schemas.microsoft.com/office/drawing/2014/main" id="{5F85A1B3-CDCB-4F24-AA25-8EF48E1AD5EC}"/>
+              </a:ext>
+            </a:extLst>
+          </p:cNvPr>
+          <p:cNvSpPr>
+            <a:spLocks noGrp="1"/>
+          </p:cNvSpPr>
+          <p:nvPr/>
+        </p:nvSpPr>
+        <p:spPr>
+          <a:xfrm>
+            <a:off x="10858500" y="6438900"/>
+            <a:ext cx="723900" cy="266700"/>
+          </a:xfrm>
+          <a:prstGeom prst="rect">
+            <a:avLst/>
+          </a:prstGeom>
+          <a:noFill/>
+          <a:ln w="0">
+            <a:noFill/>
+          </a:ln>
+        </p:spPr>
+        <p:txBody>
+          <a:bodyPr lIns="0" tIns="0" rIns="0" bIns="0" anchor="ctr">
+            <a:noAutofit/>
+          </a:bodyPr>
+          <a:lstStyle>
+            <a:defPPr algn="r">
+              <a:defRPr sz="1350">
+                <a:solidFill>
+                  <a:srgbClr val="646173"/>
+                </a:solidFill>
+                <a:latin typeface="Microsoft YaHei"/>
+                <a:ea typeface="Microsoft YaHei"/>
+                <a:cs typeface="Microsoft YaHei"/>
+              </a:defRPr>
+            </a:defPPr>
+          </a:lstStyle>
+          <a:p>
+            <a:pPr algn="r">
+              <a:lnSpc>
+                <a:spcPct val="120000"/>
+              </a:lnSpc>
+              <a:defRPr sz="1350">
+                <a:solidFill>
+                  <a:srgbClr val="646173"/>
+                </a:solidFill>
+                <a:latin typeface="Microsoft YaHei"/>
+                <a:ea typeface="Microsoft YaHei"/>
+                <a:cs typeface="Microsoft YaHei"/>
+              </a:defRPr>
+            </a:pPr>
+            <a:fld id="{75B848E0-9682-403C-9CB3-292C512CADED}" type="slidenum">
+              <a:rPr sz="1350">
+                <a:solidFill>
+                  <a:srgbClr val="646173"/>
+                </a:solidFill>
+                <a:latin typeface="Microsoft YaHei"/>
+                <a:ea typeface="Microsoft YaHei"/>
+                <a:cs typeface="Microsoft YaHei"/>
+              </a:rPr>
+              <a:t>17</a:t>
+            </a:fld>
+            <a:endParaRPr sz="1350">
+              <a:solidFill>
+                <a:srgbClr val="646173"/>
+              </a:solidFill>
+              <a:latin typeface="Microsoft YaHei"/>
+              <a:ea typeface="Microsoft YaHei"/>
+              <a:cs typeface="Microsoft YaHei"/>
+            </a:endParaRPr>
+          </a:p>
+        </p:txBody>
+      </p:sp>
+    </p:spTree>
+    <p:extLst>
+      <p:ext uri="{BB962C8B-B14F-4D97-AF65-F5344CB8AC3E}">
+        <p14:creationId xmlns:p14="http://schemas.microsoft.com/office/powerpoint/2010/main" val="1534138162"/>
+      </p:ext>
+    </p:extLst>
+  </p:cSld>
+  <p:clrMapOvr>
+    <a:masterClrMapping/>
+  </p:clrMapOvr>
+</p:sld>
+</file>
+
 <file path=ppt/slides/lesson_7_1.xml><?xml version="1.0" encoding="utf-8"?>
 <p:sld xmlns:a="http://schemas.openxmlformats.org/drawingml/2006/main" xmlns:r="http://schemas.openxmlformats.org/officeDocument/2006/relationships" xmlns:p="http://schemas.openxmlformats.org/presentationml/2006/main">
   <p:cSld>
@@ -29739,7 +30767,7 @@
                 <a:ea typeface="Microsoft YaHei"/>
                 <a:cs typeface="Microsoft YaHei"/>
               </a:rPr>
-              <a:t>17</a:t>
+              <a:t>18</a:t>
             </a:fld>
             <a:endParaRPr sz="1350">
               <a:solidFill>

--- a/learning/P01_zephyr_make_project/slides/P007_Zephyr应用构建_Windows.pptx
+++ b/learning/P01_zephyr_make_project/slides/P007_Zephyr应用构建_Windows.pptx
@@ -23319,7 +23319,18 @@
                 <a:ea typeface="Microsoft YaHei"/>
                 <a:cs typeface="Microsoft YaHei"/>
               </a:rPr>
-              <a:t>链接 → zephyr.elf</a:t>
+              <a:t>链接 → </a:t>
+            </a:r>
+            <a:r>
+              <a:rPr sz="1950">
+                <a:solidFill>
+                  <a:srgbClr val="0070C0"/>
+                </a:solidFill>
+                <a:latin typeface="Microsoft YaHei"/>
+                <a:ea typeface="Microsoft YaHei"/>
+                <a:cs typeface="Microsoft YaHei"/>
+              </a:rPr>
+              <a:t>zephyr.elf</a:t>
             </a:r>
           </a:p>
         </p:txBody>
@@ -23468,6 +23479,7 @@
               <a:t>zephyr.elf</a:t>
             </a:r>
             <a:r>
+              <a:rPr/>
               <a:t>：含加载段、符号；启用的调试信息供 GDB 使用。</a:t>
             </a:r>
           </a:p>
@@ -23497,6 +23509,7 @@
               <a:t>zephyr.hex</a:t>
             </a:r>
             <a:r>
+              <a:rPr/>
               <a:t>：Intel HEX 地址与数据记录。</a:t>
             </a:r>
           </a:p>
@@ -23526,6 +23539,7 @@
               <a:t>zephyr.bin</a:t>
             </a:r>
             <a:r>
+              <a:rPr/>
               <a:t>：裸数据；写入地址由板 / runner / 工具参数提供。</a:t>
             </a:r>
           </a:p>
@@ -23600,6 +23614,7 @@
               <a:t>CONFIG_BUILD_OUTPUT_HEX</a:t>
             </a:r>
             <a:r>
+              <a:rPr/>
               <a:t> / </a:t>
             </a:r>
             <a:r>
@@ -23611,6 +23626,7 @@
               <a:t>CONFIG_BUILD_OUTPUT_BIN</a:t>
             </a:r>
             <a:r>
+              <a:rPr/>
               <a:t> 控制派生格式。</a:t>
             </a:r>
           </a:p>
@@ -23632,6 +23648,7 @@
               </a:defRPr>
             </a:pPr>
             <a:r>
+              <a:rPr/>
               <a:t>查看构建目录的 </a:t>
             </a:r>
             <a:r>
@@ -23643,6 +23660,7 @@
               <a:t>zephyr/.config</a:t>
             </a:r>
             <a:r>
+              <a:rPr/>
               <a:t>；芯片型号不直接决定文件格式。</a:t>
             </a:r>
           </a:p>
@@ -23664,6 +23682,7 @@
               </a:defRPr>
             </a:pPr>
             <a:r>
+              <a:rPr/>
               <a:t>本页只核对产物，烧录格式由具体 runner 选择。</a:t>
             </a:r>
           </a:p>
@@ -23736,7 +23755,34 @@
                 </a:solidFill>
                 <a:hlinkClick r:id="R58b8de9fee2f41a6"/>
               </a:rPr>
-              <a:t>依据：Kconfig.zephyr 的 BUILD_OUTPUT_*；根 CMakeLists.txt</a:t>
+              <a:t>依据：</a:t>
+            </a:r>
+            <a:r>
+              <a:rPr u="sng">
+                <a:solidFill>
+                  <a:srgbClr val="0070C0"/>
+                </a:solidFill>
+                <a:hlinkClick r:id="R58b8de9fee2f41a6"/>
+              </a:rPr>
+              <a:t>Kconfig.zephyr</a:t>
+            </a:r>
+            <a:r>
+              <a:rPr u="sng">
+                <a:solidFill>
+                  <a:srgbClr val="397589"/>
+                </a:solidFill>
+                <a:hlinkClick r:id="R58b8de9fee2f41a6"/>
+              </a:rPr>
+              <a:t> 的 BUILD_OUTPUT_*；根 </a:t>
+            </a:r>
+            <a:r>
+              <a:rPr u="sng">
+                <a:solidFill>
+                  <a:srgbClr val="0070C0"/>
+                </a:solidFill>
+                <a:hlinkClick r:id="R58b8de9fee2f41a6"/>
+              </a:rPr>
+              <a:t>CMakeLists.txt</a:t>
             </a:r>
           </a:p>
         </p:txBody>
@@ -24204,13 +24250,24 @@
             <a:r>
               <a:rPr sz="1950" b="0">
                 <a:solidFill>
-                  <a:srgbClr val="29263B"/>
-                </a:solidFill>
-                <a:latin typeface="Microsoft YaHei"/>
-                <a:ea typeface="Microsoft YaHei"/>
-                <a:cs typeface="Microsoft YaHei"/>
-              </a:rPr>
-              <a:t>west 的下载、扩展与 CMake 调用交给独立的 P008。</a:t>
+                  <a:srgbClr val="A02B93"/>
+                </a:solidFill>
+                <a:latin typeface="Microsoft YaHei"/>
+                <a:ea typeface="Microsoft YaHei"/>
+                <a:cs typeface="Microsoft YaHei"/>
+              </a:rPr>
+              <a:t>west</a:t>
+            </a:r>
+            <a:r>
+              <a:rPr sz="1950" b="0">
+                <a:solidFill>
+                  <a:srgbClr val="29263B"/>
+                </a:solidFill>
+                <a:latin typeface="Microsoft YaHei"/>
+                <a:ea typeface="Microsoft YaHei"/>
+                <a:cs typeface="Microsoft YaHei"/>
+              </a:rPr>
+              <a:t> 的下载、扩展与 CMake 调用交给独立的 P008。</a:t>
             </a:r>
           </a:p>
         </p:txBody>
@@ -24801,7 +24858,16 @@
               <a:rPr u="sng">
                 <a:hlinkClick r:id="R3ab6acf61648498d"/>
               </a:rPr>
-              <a:t>依据：doc/build/cmake/index.rst</a:t>
+              <a:t>依据：</a:t>
+            </a:r>
+            <a:r>
+              <a:rPr u="sng">
+                <a:solidFill>
+                  <a:srgbClr val="0070C0"/>
+                </a:solidFill>
+                <a:hlinkClick r:id="R3ab6acf61648498d"/>
+              </a:rPr>
+              <a:t>doc/build/cmake/index.rst</a:t>
             </a:r>
           </a:p>
         </p:txBody>
@@ -24949,6 +25015,107 @@
               <a:ea typeface="Microsoft YaHei"/>
               <a:cs typeface="Microsoft YaHei"/>
             </a:endParaRPr>
+          </a:p>
+        </p:txBody>
+      </p:sp>
+      <p:sp>
+        <p:nvSpPr>
+          <p:cNvPr id="15" name="Semantic color legend">
+            <a:extLst>
+              <a:ext uri="{FF2B5EF4-FFF2-40B4-BE49-F238E27FC236}">
+                <a16:creationId xmlns:a16="http://schemas.microsoft.com/office/drawing/2014/main" id="{39154CEE-9E0E-4815-8A42-342F49989EDD}"/>
+              </a:ext>
+            </a:extLst>
+          </p:cNvPr>
+          <p:cNvSpPr>
+            <a:spLocks noGrp="1"/>
+          </p:cNvSpPr>
+          <p:nvPr/>
+        </p:nvSpPr>
+        <p:spPr>
+          <a:xfrm>
+            <a:off x="609600" y="5314950"/>
+            <a:ext cx="10972800" cy="342900"/>
+          </a:xfrm>
+          <a:prstGeom prst="rect">
+            <a:avLst/>
+          </a:prstGeom>
+          <a:noFill/>
+          <a:ln w="0">
+            <a:noFill/>
+          </a:ln>
+        </p:spPr>
+        <p:txBody>
+          <a:bodyPr>
+            <a:noAutofit/>
+          </a:bodyPr>
+          <a:lstStyle>
+            <a:defPPr>
+              <a:defRPr sz="1575">
+                <a:solidFill>
+                  <a:srgbClr val="646173"/>
+                </a:solidFill>
+                <a:latin typeface="Microsoft YaHei"/>
+                <a:ea typeface="Microsoft YaHei"/>
+                <a:cs typeface="Microsoft YaHei"/>
+              </a:defRPr>
+            </a:defPPr>
+          </a:lstStyle>
+          <a:p>
+            <a:pPr>
+              <a:defRPr sz="1575">
+                <a:solidFill>
+                  <a:srgbClr val="646173"/>
+                </a:solidFill>
+                <a:latin typeface="Microsoft YaHei"/>
+                <a:ea typeface="Microsoft YaHei"/>
+                <a:cs typeface="Microsoft YaHei"/>
+              </a:defRPr>
+            </a:pPr>
+            <a:r>
+              <a:t>阅读标色： </a:t>
+            </a:r>
+            <a:r>
+              <a:rPr>
+                <a:solidFill>
+                  <a:srgbClr val="B84E00"/>
+                </a:solidFill>
+              </a:rPr>
+              <a:t>变量 / 参数</a:t>
+            </a:r>
+            <a:r>
+              <a:t>     </a:t>
+            </a:r>
+            <a:r>
+              <a:rPr>
+                <a:solidFill>
+                  <a:srgbClr val="0070C0"/>
+                </a:solidFill>
+              </a:rPr>
+              <a:t>文件 / 路径</a:t>
+            </a:r>
+            <a:r>
+              <a:t>     </a:t>
+            </a:r>
+            <a:r>
+              <a:rPr>
+                <a:solidFill>
+                  <a:srgbClr val="087B3D"/>
+                </a:solidFill>
+              </a:rPr>
+              <a:t>接口函数</a:t>
+            </a:r>
+            <a:r>
+              <a:t>     </a:t>
+            </a:r>
+            <a:r>
+              <a:rPr>
+                <a:solidFill>
+                  <a:srgbClr val="A02B93"/>
+                </a:solidFill>
+              </a:rPr>
+              <a:t>终端命令</a:t>
+            </a:r>
           </a:p>
         </p:txBody>
       </p:sp>
@@ -25240,7 +25407,51 @@
                 <a:ea typeface="Microsoft YaHei"/>
                 <a:cs typeface="Microsoft YaHei"/>
               </a:rPr>
-              <a:t>P002：CMake、Ninja、dtc、gperf 与已激活的 Python venv。</a:t>
+              <a:t>P002：CMake、Ninja、</a:t>
+            </a:r>
+            <a:r>
+              <a:rPr sz="1950" b="0">
+                <a:solidFill>
+                  <a:srgbClr val="A02B93"/>
+                </a:solidFill>
+                <a:latin typeface="Microsoft YaHei"/>
+                <a:ea typeface="Microsoft YaHei"/>
+                <a:cs typeface="Microsoft YaHei"/>
+              </a:rPr>
+              <a:t>dtc</a:t>
+            </a:r>
+            <a:r>
+              <a:rPr sz="1950" b="0">
+                <a:solidFill>
+                  <a:srgbClr val="29263B"/>
+                </a:solidFill>
+                <a:latin typeface="Microsoft YaHei"/>
+                <a:ea typeface="Microsoft YaHei"/>
+                <a:cs typeface="Microsoft YaHei"/>
+              </a:rPr>
+              <a:t>、</a:t>
+            </a:r>
+            <a:r>
+              <a:rPr sz="1950" b="0">
+                <a:solidFill>
+                  <a:srgbClr val="A02B93"/>
+                </a:solidFill>
+                <a:latin typeface="Microsoft YaHei"/>
+                <a:ea typeface="Microsoft YaHei"/>
+                <a:cs typeface="Microsoft YaHei"/>
+              </a:rPr>
+              <a:t>gperf</a:t>
+            </a:r>
+            <a:r>
+              <a:rPr sz="1950" b="0">
+                <a:solidFill>
+                  <a:srgbClr val="29263B"/>
+                </a:solidFill>
+                <a:latin typeface="Microsoft YaHei"/>
+                <a:ea typeface="Microsoft YaHei"/>
+                <a:cs typeface="Microsoft YaHei"/>
+              </a:rPr>
+              <a:t> 与已激活的 Python venv。</a:t>
             </a:r>
           </a:p>
           <a:p>
@@ -25300,7 +25511,29 @@
                 <a:ea typeface="Microsoft YaHei"/>
                 <a:cs typeface="Microsoft YaHei"/>
               </a:rPr>
-              <a:t>P004—P005：正确 west 工作区中的 CMSIS 已下载并可发现。</a:t>
+              <a:t>P004—P005：正确 </a:t>
+            </a:r>
+            <a:r>
+              <a:rPr sz="1950" b="0">
+                <a:solidFill>
+                  <a:srgbClr val="A02B93"/>
+                </a:solidFill>
+                <a:latin typeface="Microsoft YaHei"/>
+                <a:ea typeface="Microsoft YaHei"/>
+                <a:cs typeface="Microsoft YaHei"/>
+              </a:rPr>
+              <a:t>west</a:t>
+            </a:r>
+            <a:r>
+              <a:rPr sz="1950" b="0">
+                <a:solidFill>
+                  <a:srgbClr val="29263B"/>
+                </a:solidFill>
+                <a:latin typeface="Microsoft YaHei"/>
+                <a:ea typeface="Microsoft YaHei"/>
+                <a:cs typeface="Microsoft YaHei"/>
+              </a:rPr>
+              <a:t> 工作区中的 CMSIS 已下载并可发现。</a:t>
             </a:r>
           </a:p>
           <a:p>
@@ -25400,7 +25633,16 @@
               <a:rPr u="sng">
                 <a:hlinkClick r:id="R231611b620514867"/>
               </a:rPr>
-              <a:t>依据：doc/build/cmake/index.rst</a:t>
+              <a:t>依据：</a:t>
+            </a:r>
+            <a:r>
+              <a:rPr u="sng">
+                <a:solidFill>
+                  <a:srgbClr val="0070C0"/>
+                </a:solidFill>
+                <a:hlinkClick r:id="R231611b620514867"/>
+              </a:rPr>
+              <a:t>doc/build/cmake/index.rst</a:t>
             </a:r>
           </a:p>
         </p:txBody>
@@ -25839,7 +26081,29 @@
                 <a:ea typeface="Microsoft YaHei"/>
                 <a:cs typeface="Microsoft YaHei"/>
               </a:rPr>
-              <a:t>Could not find … Zephyr-sdk 表示这次配置未找到所需 SDK 包。</a:t>
+              <a:t>Could not </a:t>
+            </a:r>
+            <a:r>
+              <a:rPr sz="1950" b="0">
+                <a:solidFill>
+                  <a:srgbClr val="A02B93"/>
+                </a:solidFill>
+                <a:latin typeface="Microsoft YaHei"/>
+                <a:ea typeface="Microsoft YaHei"/>
+                <a:cs typeface="Microsoft YaHei"/>
+              </a:rPr>
+              <a:t>find</a:t>
+            </a:r>
+            <a:r>
+              <a:rPr sz="1950" b="0">
+                <a:solidFill>
+                  <a:srgbClr val="29263B"/>
+                </a:solidFill>
+                <a:latin typeface="Microsoft YaHei"/>
+                <a:ea typeface="Microsoft YaHei"/>
+                <a:cs typeface="Microsoft YaHei"/>
+              </a:rPr>
+              <a:t> … Zephyr-sdk 表示这次配置未找到所需 SDK 包。</a:t>
             </a:r>
           </a:p>
           <a:p>
@@ -25863,13 +26127,24 @@
             <a:r>
               <a:rPr sz="1950" b="0">
                 <a:solidFill>
-                  <a:srgbClr val="29263B"/>
-                </a:solidFill>
-                <a:latin typeface="Microsoft YaHei"/>
-                <a:ea typeface="Microsoft YaHei"/>
-                <a:cs typeface="Microsoft YaHei"/>
-              </a:rPr>
-              <a:t>Zephyr_DIR 只指定源码包，不会同时指定 SDK。</a:t>
+                  <a:srgbClr val="B84E00"/>
+                </a:solidFill>
+                <a:latin typeface="Microsoft YaHei"/>
+                <a:ea typeface="Microsoft YaHei"/>
+                <a:cs typeface="Microsoft YaHei"/>
+              </a:rPr>
+              <a:t>Zephyr_DIR</a:t>
+            </a:r>
+            <a:r>
+              <a:rPr sz="1950" b="0">
+                <a:solidFill>
+                  <a:srgbClr val="29263B"/>
+                </a:solidFill>
+                <a:latin typeface="Microsoft YaHei"/>
+                <a:ea typeface="Microsoft YaHei"/>
+                <a:cs typeface="Microsoft YaHei"/>
+              </a:rPr>
+              <a:t> 只指定源码包，不会同时指定 SDK。</a:t>
             </a:r>
           </a:p>
           <a:p>
@@ -26490,7 +26765,16 @@
               <a:rPr u="sng">
                 <a:hlinkClick r:id="R37ef79222a54451f"/>
               </a:rPr>
-              <a:t>依据：doc/build/cmake/index.rst</a:t>
+              <a:t>依据：</a:t>
+            </a:r>
+            <a:r>
+              <a:rPr u="sng">
+                <a:solidFill>
+                  <a:srgbClr val="0070C0"/>
+                </a:solidFill>
+                <a:hlinkClick r:id="R37ef79222a54451f"/>
+              </a:rPr>
+              <a:t>doc/build/cmake/index.rst</a:t>
             </a:r>
           </a:p>
         </p:txBody>
@@ -26899,7 +27183,51 @@
                 <a:ea typeface="Microsoft YaHei"/>
                 <a:cs typeface="Microsoft YaHei"/>
               </a:rPr>
-              <a:t>SDK 根含 sdk_version、cmake/Zephyr-sdkConfig.cmake 和 ARM 工具链。</a:t>
+              <a:t>SDK 根含 </a:t>
+            </a:r>
+            <a:r>
+              <a:rPr sz="1950" b="0">
+                <a:solidFill>
+                  <a:srgbClr val="0070C0"/>
+                </a:solidFill>
+                <a:latin typeface="Microsoft YaHei"/>
+                <a:ea typeface="Microsoft YaHei"/>
+                <a:cs typeface="Microsoft YaHei"/>
+              </a:rPr>
+              <a:t>sdk_version</a:t>
+            </a:r>
+            <a:r>
+              <a:rPr sz="1950" b="0">
+                <a:solidFill>
+                  <a:srgbClr val="29263B"/>
+                </a:solidFill>
+                <a:latin typeface="Microsoft YaHei"/>
+                <a:ea typeface="Microsoft YaHei"/>
+                <a:cs typeface="Microsoft YaHei"/>
+              </a:rPr>
+              <a:t>、</a:t>
+            </a:r>
+            <a:r>
+              <a:rPr sz="1950" b="0">
+                <a:solidFill>
+                  <a:srgbClr val="0070C0"/>
+                </a:solidFill>
+                <a:latin typeface="Microsoft YaHei"/>
+                <a:ea typeface="Microsoft YaHei"/>
+                <a:cs typeface="Microsoft YaHei"/>
+              </a:rPr>
+              <a:t>cmake/Zephyr-sdkConfig.cmake</a:t>
+            </a:r>
+            <a:r>
+              <a:rPr sz="1950" b="0">
+                <a:solidFill>
+                  <a:srgbClr val="29263B"/>
+                </a:solidFill>
+                <a:latin typeface="Microsoft YaHei"/>
+                <a:ea typeface="Microsoft YaHei"/>
+                <a:cs typeface="Microsoft YaHei"/>
+              </a:rPr>
+              <a:t> 和 ARM 工具链。</a:t>
             </a:r>
           </a:p>
           <a:p>
@@ -26929,7 +27257,29 @@
                 <a:ea typeface="Microsoft YaHei"/>
                 <a:cs typeface="Microsoft YaHei"/>
               </a:rPr>
-              <a:t>未注册或搬动位置：按 P003 在 PowerShell 的 SDK 根执行 setup.cmd /c。</a:t>
+              <a:t>未注册或搬动位置：按 P003 在 PowerShell 的 SDK 根执行 </a:t>
+            </a:r>
+            <a:r>
+              <a:rPr sz="1950" b="0">
+                <a:solidFill>
+                  <a:srgbClr val="0070C0"/>
+                </a:solidFill>
+                <a:latin typeface="Microsoft YaHei"/>
+                <a:ea typeface="Microsoft YaHei"/>
+                <a:cs typeface="Microsoft YaHei"/>
+              </a:rPr>
+              <a:t>setup.cmd</a:t>
+            </a:r>
+            <a:r>
+              <a:rPr sz="1950" b="0">
+                <a:solidFill>
+                  <a:srgbClr val="29263B"/>
+                </a:solidFill>
+                <a:latin typeface="Microsoft YaHei"/>
+                <a:ea typeface="Microsoft YaHei"/>
+                <a:cs typeface="Microsoft YaHei"/>
+              </a:rPr>
+              <a:t> /c。</a:t>
             </a:r>
           </a:p>
           <a:p>
@@ -26989,7 +27339,29 @@
                 <a:ea typeface="Microsoft YaHei"/>
                 <a:cs typeface="Microsoft YaHei"/>
               </a:rPr>
-              <a:t>主动固定版本时才传 ZEPHYR_SDK_INSTALL_DIR；默认类型不用重写。</a:t>
+              <a:t>主动固定版本时才传 </a:t>
+            </a:r>
+            <a:r>
+              <a:rPr sz="1950" b="0">
+                <a:solidFill>
+                  <a:srgbClr val="B84E00"/>
+                </a:solidFill>
+                <a:latin typeface="Microsoft YaHei"/>
+                <a:ea typeface="Microsoft YaHei"/>
+                <a:cs typeface="Microsoft YaHei"/>
+              </a:rPr>
+              <a:t>ZEPHYR_SDK_INSTALL_DIR</a:t>
+            </a:r>
+            <a:r>
+              <a:rPr sz="1950" b="0">
+                <a:solidFill>
+                  <a:srgbClr val="29263B"/>
+                </a:solidFill>
+                <a:latin typeface="Microsoft YaHei"/>
+                <a:ea typeface="Microsoft YaHei"/>
+                <a:cs typeface="Microsoft YaHei"/>
+              </a:rPr>
+              <a:t>；默认类型不用重写。</a:t>
             </a:r>
           </a:p>
           <a:p>
@@ -27089,7 +27461,16 @@
               <a:rPr u="sng">
                 <a:hlinkClick r:id="Rf626473907134571"/>
               </a:rPr>
-              <a:t>依据：doc/build/cmake/index.rst</a:t>
+              <a:t>依据：</a:t>
+            </a:r>
+            <a:r>
+              <a:rPr u="sng">
+                <a:solidFill>
+                  <a:srgbClr val="0070C0"/>
+                </a:solidFill>
+                <a:hlinkClick r:id="Rf626473907134571"/>
+              </a:rPr>
+              <a:t>doc/build/cmake/index.rst</a:t>
             </a:r>
           </a:p>
         </p:txBody>
@@ -27522,13 +27903,24 @@
             <a:r>
               <a:rPr sz="1950" b="0">
                 <a:solidFill>
-                  <a:srgbClr val="29263B"/>
-                </a:solidFill>
-                <a:latin typeface="Microsoft YaHei"/>
-                <a:ea typeface="Microsoft YaHei"/>
-                <a:cs typeface="Microsoft YaHei"/>
-              </a:rPr>
-              <a:t>find_package(Zephyr) 执行源码包入口及其 CMake 脚本。</a:t>
+                  <a:srgbClr val="087B3D"/>
+                </a:solidFill>
+                <a:latin typeface="Microsoft YaHei"/>
+                <a:ea typeface="Microsoft YaHei"/>
+                <a:cs typeface="Microsoft YaHei"/>
+              </a:rPr>
+              <a:t>find_package</a:t>
+            </a:r>
+            <a:r>
+              <a:rPr sz="1950" b="0">
+                <a:solidFill>
+                  <a:srgbClr val="29263B"/>
+                </a:solidFill>
+                <a:latin typeface="Microsoft YaHei"/>
+                <a:ea typeface="Microsoft YaHei"/>
+                <a:cs typeface="Microsoft YaHei"/>
+              </a:rPr>
+              <a:t>(Zephyr) 执行源码包入口及其 CMake 脚本。</a:t>
             </a:r>
           </a:p>
           <a:p>
@@ -27558,7 +27950,51 @@
                 <a:ea typeface="Microsoft YaHei"/>
                 <a:cs typeface="Microsoft YaHei"/>
               </a:rPr>
-              <a:t>返回应用入口后，target_sources 给已有 app 库添加 main.c。</a:t>
+              <a:t>返回应用入口后，</a:t>
+            </a:r>
+            <a:r>
+              <a:rPr sz="1950" b="0">
+                <a:solidFill>
+                  <a:srgbClr val="087B3D"/>
+                </a:solidFill>
+                <a:latin typeface="Microsoft YaHei"/>
+                <a:ea typeface="Microsoft YaHei"/>
+                <a:cs typeface="Microsoft YaHei"/>
+              </a:rPr>
+              <a:t>target_sources</a:t>
+            </a:r>
+            <a:r>
+              <a:rPr sz="1950" b="0">
+                <a:solidFill>
+                  <a:srgbClr val="29263B"/>
+                </a:solidFill>
+                <a:latin typeface="Microsoft YaHei"/>
+                <a:ea typeface="Microsoft YaHei"/>
+                <a:cs typeface="Microsoft YaHei"/>
+              </a:rPr>
+              <a:t> 给已有 app 库添加 </a:t>
+            </a:r>
+            <a:r>
+              <a:rPr sz="1950" b="0">
+                <a:solidFill>
+                  <a:srgbClr val="0070C0"/>
+                </a:solidFill>
+                <a:latin typeface="Microsoft YaHei"/>
+                <a:ea typeface="Microsoft YaHei"/>
+                <a:cs typeface="Microsoft YaHei"/>
+              </a:rPr>
+              <a:t>main.c</a:t>
+            </a:r>
+            <a:r>
+              <a:rPr sz="1950" b="0">
+                <a:solidFill>
+                  <a:srgbClr val="29263B"/>
+                </a:solidFill>
+                <a:latin typeface="Microsoft YaHei"/>
+                <a:ea typeface="Microsoft YaHei"/>
+                <a:cs typeface="Microsoft YaHei"/>
+              </a:rPr>
+              <a:t>。</a:t>
             </a:r>
           </a:p>
         </p:txBody>
@@ -28149,7 +28585,16 @@
               <a:rPr u="sng">
                 <a:hlinkClick r:id="Rbe60049566c84ff9"/>
               </a:rPr>
-              <a:t>依据：doc/build/cmake/index.rst</a:t>
+              <a:t>依据：</a:t>
+            </a:r>
+            <a:r>
+              <a:rPr u="sng">
+                <a:solidFill>
+                  <a:srgbClr val="0070C0"/>
+                </a:solidFill>
+                <a:hlinkClick r:id="Rbe60049566c84ff9"/>
+              </a:rPr>
+              <a:t>doc/build/cmake/index.rst</a:t>
             </a:r>
           </a:p>
         </p:txBody>
@@ -28854,7 +29299,7 @@
             <a:r>
               <a:rPr sz="1800" b="0">
                 <a:solidFill>
-                  <a:srgbClr val="29263B"/>
+                  <a:srgbClr val="646173"/>
                 </a:solidFill>
                 <a:latin typeface="Consolas"/>
                 <a:ea typeface="Consolas"/>
@@ -28993,39 +29438,61 @@
                 <a:ea typeface="Consolas"/>
                 <a:cs typeface="Consolas"/>
               </a:rPr>
-              <a:t> -l </a:t>
-            </a:r>
-            <a:r>
-              <a:rPr>
-                <a:solidFill>
-                  <a:srgbClr val="0070C0"/>
-                </a:solidFill>
-              </a:rPr>
-              <a:t>build/learning-tools/p003/cmake-demo/zephyr/zephyr.elf</a:t>
-            </a:r>
-          </a:p>
-          <a:p>
-            <a:pPr>
-              <a:lnSpc>
-                <a:spcPct val="120000"/>
-              </a:lnSpc>
-              <a:spcAft>
-                <a:spcPts val="0"/>
-              </a:spcAft>
-              <a:buNone/>
-              <a:defRPr sz="1800" b="0">
-                <a:solidFill>
-                  <a:srgbClr val="29263B"/>
+              <a:t> </a:t>
+            </a:r>
+            <a:r>
+              <a:rPr sz="1800" b="0">
+                <a:solidFill>
+                  <a:srgbClr val="B84E00"/>
                 </a:solidFill>
                 <a:latin typeface="Consolas"/>
                 <a:ea typeface="Consolas"/>
                 <a:cs typeface="Consolas"/>
+              </a:rPr>
+              <a:t>-l</a:t>
+            </a:r>
+            <a:r>
+              <a:rPr sz="1800" b="0">
+                <a:solidFill>
+                  <a:srgbClr val="29263B"/>
+                </a:solidFill>
+                <a:latin typeface="Consolas"/>
+                <a:ea typeface="Consolas"/>
+                <a:cs typeface="Consolas"/>
+              </a:rPr>
+              <a:t> </a:t>
+            </a:r>
+            <a:r>
+              <a:rPr>
+                <a:solidFill>
+                  <a:srgbClr val="0070C0"/>
+                </a:solidFill>
+              </a:rPr>
+              <a:t>build/learning-tools/p003/cmake-demo/zephyr/zephyr.elf</a:t>
+            </a:r>
+          </a:p>
+          <a:p>
+            <a:pPr>
+              <a:lnSpc>
+                <a:spcPct val="120000"/>
+              </a:lnSpc>
+              <a:spcAft>
+                <a:spcPts val="0"/>
+              </a:spcAft>
+              <a:buNone/>
+              <a:defRPr sz="1800" b="0">
+                <a:solidFill>
+                  <a:srgbClr val="29263B"/>
+                </a:solidFill>
+                <a:latin typeface="Consolas"/>
+                <a:ea typeface="Consolas"/>
+                <a:cs typeface="Consolas"/>
               </a:defRPr>
             </a:pPr>
             <a:r>
               <a:rPr sz="1800" b="0">
                 <a:solidFill>
-                  <a:srgbClr val="29263B"/>
+                  <a:srgbClr val="646173"/>
                 </a:solidFill>
                 <a:latin typeface="Consolas"/>
                 <a:ea typeface="Consolas"/>
@@ -29198,7 +29665,23 @@
                   <a:srgbClr val="A02B93"/>
                 </a:solidFill>
               </a:rPr>
-              <a:t>cmake --build</a:t>
+              <a:t>cmake</a:t>
+            </a:r>
+            <a:r>
+              <a:rPr>
+                <a:solidFill>
+                  <a:srgbClr val="A02B93"/>
+                </a:solidFill>
+              </a:rPr>
+              <a:t> </a:t>
+            </a:r>
+            <a:r>
+              <a:rPr>
+                <a:solidFill>
+                  <a:srgbClr val="B84E00"/>
+                </a:solidFill>
+              </a:rPr>
+              <a:t>--build</a:t>
             </a:r>
             <a:r>
               <a:rPr sz="1950" b="0">
@@ -29447,7 +29930,16 @@
               <a:rPr u="sng">
                 <a:hlinkClick r:id="rId4"/>
               </a:rPr>
-              <a:t>源码定位：doc/develop/application/index.rst</a:t>
+              <a:t>源码定位：</a:t>
+            </a:r>
+            <a:r>
+              <a:rPr u="sng">
+                <a:solidFill>
+                  <a:srgbClr val="0070C0"/>
+                </a:solidFill>
+                <a:hlinkClick r:id="rId4"/>
+              </a:rPr>
+              <a:t>doc/develop/application/index.rst</a:t>
             </a:r>
           </a:p>
         </p:txBody>
@@ -29920,7 +30412,7 @@
             <a:r>
               <a:rPr sz="1800" b="0">
                 <a:solidFill>
-                  <a:srgbClr val="29263B"/>
+                  <a:srgbClr val="646173"/>
                 </a:solidFill>
                 <a:latin typeface="Consolas"/>
                 <a:ea typeface="Consolas"/>
@@ -29931,7 +30423,7 @@
             <a:r>
               <a:rPr>
                 <a:solidFill>
-                  <a:srgbClr val="A02B93"/>
+                  <a:srgbClr val="646173"/>
                 </a:solidFill>
               </a:rPr>
               <a:t>cmake</a:t>
@@ -29939,7 +30431,7 @@
             <a:r>
               <a:rPr sz="1800" b="0">
                 <a:solidFill>
-                  <a:srgbClr val="29263B"/>
+                  <a:srgbClr val="646173"/>
                 </a:solidFill>
                 <a:latin typeface="Consolas"/>
                 <a:ea typeface="Consolas"/>
@@ -30072,7 +30564,7 @@
             <a:r>
               <a:rPr sz="1800" b="0">
                 <a:solidFill>
-                  <a:srgbClr val="29263B"/>
+                  <a:srgbClr val="646173"/>
                 </a:solidFill>
                 <a:latin typeface="Consolas"/>
                 <a:ea typeface="Consolas"/>
@@ -30245,7 +30737,15 @@
                   <a:srgbClr val="B84E00"/>
                 </a:solidFill>
               </a:rPr>
-              <a:t>--parallel 4</a:t>
+              <a:t>--parallel</a:t>
+            </a:r>
+            <a:r>
+              <a:rPr>
+                <a:solidFill>
+                  <a:srgbClr val="B84E00"/>
+                </a:solidFill>
+              </a:rPr>
+              <a:t> 4</a:t>
             </a:r>
             <a:r>
               <a:rPr sz="1950" b="0">
@@ -30332,7 +30832,15 @@
                   <a:srgbClr val="B84E00"/>
                 </a:solidFill>
               </a:rPr>
-              <a:t>--target app</a:t>
+              <a:t>--target</a:t>
+            </a:r>
+            <a:r>
+              <a:rPr>
+                <a:solidFill>
+                  <a:srgbClr val="B84E00"/>
+                </a:solidFill>
+              </a:rPr>
+              <a:t> app</a:t>
             </a:r>
             <a:r>
               <a:rPr sz="1950" b="0">
@@ -30370,7 +30878,23 @@
                   <a:srgbClr val="A02B93"/>
                 </a:solidFill>
               </a:rPr>
-              <a:t>cmake --build</a:t>
+              <a:t>cmake</a:t>
+            </a:r>
+            <a:r>
+              <a:rPr>
+                <a:solidFill>
+                  <a:srgbClr val="A02B93"/>
+                </a:solidFill>
+              </a:rPr>
+              <a:t> </a:t>
+            </a:r>
+            <a:r>
+              <a:rPr>
+                <a:solidFill>
+                  <a:srgbClr val="B84E00"/>
+                </a:solidFill>
+              </a:rPr>
+              <a:t>--build</a:t>
             </a:r>
             <a:r>
               <a:rPr sz="1950" b="0">
@@ -30559,7 +31083,16 @@
               <a:rPr u="sng">
                 <a:hlinkClick r:id="rId4"/>
               </a:rPr>
-              <a:t>源码定位：doc/develop/application/index.rst</a:t>
+              <a:t>源码定位：</a:t>
+            </a:r>
+            <a:r>
+              <a:rPr u="sng">
+                <a:solidFill>
+                  <a:srgbClr val="0070C0"/>
+                </a:solidFill>
+                <a:hlinkClick r:id="rId4"/>
+              </a:rPr>
+              <a:t>doc/develop/application/index.rst</a:t>
             </a:r>
           </a:p>
         </p:txBody>
@@ -31332,7 +31865,19 @@
                 <a:cs typeface="Microsoft YaHei"/>
                 <a:hlinkClick r:id="rId3"/>
               </a:rPr>
-              <a:t>官方说明：doc/develop/application/index.rst</a:t>
+              <a:t>官方说明：</a:t>
+            </a:r>
+            <a:r>
+              <a:rPr sz="1275" b="0">
+                <a:solidFill>
+                  <a:srgbClr val="0070C0"/>
+                </a:solidFill>
+                <a:latin typeface="Microsoft YaHei"/>
+                <a:ea typeface="Microsoft YaHei"/>
+                <a:cs typeface="Microsoft YaHei"/>
+                <a:hlinkClick r:id="rId3"/>
+              </a:rPr>
+              <a:t>doc/develop/application/index.rst</a:t>
             </a:r>
           </a:p>
         </p:txBody>
@@ -31401,7 +31946,31 @@
                 <a:cs typeface="Microsoft YaHei"/>
                 <a:hlinkClick r:id="rId4"/>
               </a:rPr>
-              <a:t>实现定位：samples/hello_world/CMakeLists.txt · 3 行附近</a:t>
+              <a:t>实现定位：</a:t>
+            </a:r>
+            <a:r>
+              <a:rPr sz="1275" b="0">
+                <a:solidFill>
+                  <a:srgbClr val="0070C0"/>
+                </a:solidFill>
+                <a:latin typeface="Microsoft YaHei"/>
+                <a:ea typeface="Microsoft YaHei"/>
+                <a:cs typeface="Microsoft YaHei"/>
+                <a:hlinkClick r:id="rId4"/>
+              </a:rPr>
+              <a:t>samples/hello_world/CMakeLists.txt</a:t>
+            </a:r>
+            <a:r>
+              <a:rPr sz="1275" b="0">
+                <a:solidFill>
+                  <a:srgbClr val="397589"/>
+                </a:solidFill>
+                <a:latin typeface="Microsoft YaHei"/>
+                <a:ea typeface="Microsoft YaHei"/>
+                <a:cs typeface="Microsoft YaHei"/>
+                <a:hlinkClick r:id="rId4"/>
+              </a:rPr>
+              <a:t> · 3 行附近</a:t>
             </a:r>
           </a:p>
         </p:txBody>
@@ -31785,7 +32354,7 @@
             <a:r>
               <a:rPr sz="1800" b="0" dirty="0">
                 <a:solidFill>
-                  <a:srgbClr val="29263B"/>
+                  <a:srgbClr val="646173"/>
                 </a:solidFill>
                 <a:latin typeface="Consolas"/>
                 <a:ea typeface="Consolas"/>
@@ -31796,7 +32365,7 @@
             <a:r>
               <a:rPr sz="1800" b="0" dirty="0" err="1">
                 <a:solidFill>
-                  <a:srgbClr val="29263B"/>
+                  <a:srgbClr val="646173"/>
                 </a:solidFill>
                 <a:latin typeface="Consolas"/>
                 <a:ea typeface="Consolas"/>
@@ -31807,7 +32376,7 @@
             <a:r>
               <a:rPr sz="1800" b="0" dirty="0" err="1">
                 <a:solidFill>
-                  <a:srgbClr val="0070C0"/>
+                  <a:srgbClr val="646173"/>
                 </a:solidFill>
                 <a:latin typeface="Consolas"/>
                 <a:ea typeface="Consolas"/>
@@ -31818,7 +32387,7 @@
             <a:r>
               <a:rPr sz="1800" b="0" dirty="0">
                 <a:solidFill>
-                  <a:srgbClr val="0070C0"/>
+                  <a:srgbClr val="646173"/>
                 </a:solidFill>
                 <a:latin typeface="Consolas"/>
                 <a:ea typeface="Consolas"/>
@@ -31829,7 +32398,7 @@
             <a:r>
               <a:rPr sz="1800" b="0" dirty="0" err="1">
                 <a:solidFill>
-                  <a:srgbClr val="0070C0"/>
+                  <a:srgbClr val="646173"/>
                 </a:solidFill>
                 <a:latin typeface="Consolas"/>
                 <a:ea typeface="Consolas"/>
@@ -31840,7 +32409,7 @@
             <a:r>
               <a:rPr sz="1800" b="0" dirty="0">
                 <a:solidFill>
-                  <a:srgbClr val="0070C0"/>
+                  <a:srgbClr val="646173"/>
                 </a:solidFill>
                 <a:latin typeface="Consolas"/>
                 <a:ea typeface="Consolas"/>
@@ -31851,7 +32420,7 @@
             <a:r>
               <a:rPr sz="1800" b="0" dirty="0">
                 <a:solidFill>
-                  <a:srgbClr val="29263B"/>
+                  <a:srgbClr val="646173"/>
                 </a:solidFill>
                 <a:latin typeface="Consolas"/>
                 <a:ea typeface="Consolas"/>
@@ -31862,7 +32431,7 @@
             <a:r>
               <a:rPr sz="1800" b="0" dirty="0" err="1">
                 <a:solidFill>
-                  <a:srgbClr val="29263B"/>
+                  <a:srgbClr val="646173"/>
                 </a:solidFill>
                 <a:latin typeface="Consolas"/>
                 <a:ea typeface="Consolas"/>
@@ -31873,7 +32442,7 @@
             <a:r>
               <a:rPr sz="1800" b="0" dirty="0">
                 <a:solidFill>
-                  <a:srgbClr val="29263B"/>
+                  <a:srgbClr val="646173"/>
                 </a:solidFill>
                 <a:latin typeface="Consolas"/>
                 <a:ea typeface="Consolas"/>
@@ -31916,55 +32485,55 @@
                 <a:ea typeface="Consolas"/>
                 <a:cs typeface="Consolas"/>
               </a:rPr>
-              <a:t>(VERSION 3.28.0)</a:t>
-            </a:r>
-          </a:p>
-          <a:p>
-            <a:pPr>
-              <a:lnSpc>
-                <a:spcPct val="120000"/>
-              </a:lnSpc>
-              <a:defRPr sz="1800" b="0">
-                <a:solidFill>
-                  <a:srgbClr val="006579"/>
+              <a:t>(</a:t>
+            </a:r>
+            <a:r>
+              <a:rPr sz="1800" b="0" dirty="0">
+                <a:solidFill>
+                  <a:srgbClr val="B84E00"/>
                 </a:solidFill>
                 <a:latin typeface="Consolas"/>
                 <a:ea typeface="Consolas"/>
                 <a:cs typeface="Consolas"/>
-              </a:defRPr>
-            </a:pPr>
-            <a:r>
-              <a:rPr sz="1800" b="0" dirty="0" err="1">
-                <a:solidFill>
-                  <a:srgbClr val="087B3D"/>
+              </a:rPr>
+              <a:t>VERSION</a:t>
+            </a:r>
+            <a:r>
+              <a:rPr sz="1800" b="0" dirty="0">
+                <a:solidFill>
+                  <a:srgbClr val="29263B"/>
                 </a:solidFill>
                 <a:latin typeface="Consolas"/>
                 <a:ea typeface="Consolas"/>
                 <a:cs typeface="Consolas"/>
               </a:rPr>
-              <a:t>find_package</a:t>
-            </a:r>
-            <a:r>
-              <a:rPr sz="1800" b="0" dirty="0">
-                <a:solidFill>
-                  <a:srgbClr val="29263B"/>
+              <a:t> 3.28.0)</a:t>
+            </a:r>
+          </a:p>
+          <a:p>
+            <a:pPr>
+              <a:lnSpc>
+                <a:spcPct val="120000"/>
+              </a:lnSpc>
+              <a:defRPr sz="1800" b="0">
+                <a:solidFill>
+                  <a:srgbClr val="006579"/>
                 </a:solidFill>
                 <a:latin typeface="Consolas"/>
                 <a:ea typeface="Consolas"/>
                 <a:cs typeface="Consolas"/>
-              </a:rPr>
-              <a:t>(Zephyr </a:t>
-            </a:r>
-            <a:r>
-              <a:rPr sz="1800" b="0" dirty="0">
-                <a:solidFill>
-                  <a:srgbClr val="B84E00"/>
+              </a:defRPr>
+            </a:pPr>
+            <a:r>
+              <a:rPr sz="1800" b="0" dirty="0" err="1">
+                <a:solidFill>
+                  <a:srgbClr val="087B3D"/>
                 </a:solidFill>
                 <a:latin typeface="Consolas"/>
                 <a:ea typeface="Consolas"/>
                 <a:cs typeface="Consolas"/>
               </a:rPr>
-              <a:t>REQUIRED</a:t>
+              <a:t>find_package</a:t>
             </a:r>
             <a:r>
               <a:rPr sz="1800" b="0" dirty="0">
@@ -31975,7 +32544,7 @@
                 <a:ea typeface="Consolas"/>
                 <a:cs typeface="Consolas"/>
               </a:rPr>
-              <a:t> </a:t>
+              <a:t>(Zephyr </a:t>
             </a:r>
             <a:r>
               <a:rPr sz="1800" b="0" dirty="0">
@@ -31986,7 +32555,7 @@
                 <a:ea typeface="Consolas"/>
                 <a:cs typeface="Consolas"/>
               </a:rPr>
-              <a:t>HINTS</a:t>
+              <a:t>REQUIRED</a:t>
             </a:r>
             <a:r>
               <a:rPr sz="1800" b="0" dirty="0">
@@ -31997,7 +32566,7 @@
                 <a:ea typeface="Consolas"/>
                 <a:cs typeface="Consolas"/>
               </a:rPr>
-              <a:t> $ENV{</a:t>
+              <a:t> </a:t>
             </a:r>
             <a:r>
               <a:rPr sz="1800" b="0" dirty="0">
@@ -32008,7 +32577,7 @@
                 <a:ea typeface="Consolas"/>
                 <a:cs typeface="Consolas"/>
               </a:rPr>
-              <a:t>ZEPHYR_BASE</a:t>
+              <a:t>HINTS</a:t>
             </a:r>
             <a:r>
               <a:rPr sz="1800" b="0" dirty="0">
@@ -32019,7 +32588,51 @@
                 <a:ea typeface="Consolas"/>
                 <a:cs typeface="Consolas"/>
               </a:rPr>
-              <a:t>})</a:t>
+              <a:t> </a:t>
+            </a:r>
+            <a:r>
+              <a:rPr sz="1800" b="0" dirty="0">
+                <a:solidFill>
+                  <a:srgbClr val="B84E00"/>
+                </a:solidFill>
+                <a:latin typeface="Consolas"/>
+                <a:ea typeface="Consolas"/>
+                <a:cs typeface="Consolas"/>
+              </a:rPr>
+              <a:t>$ENV{</a:t>
+            </a:r>
+            <a:r>
+              <a:rPr sz="1800" b="0" dirty="0">
+                <a:solidFill>
+                  <a:srgbClr val="B84E00"/>
+                </a:solidFill>
+                <a:latin typeface="Consolas"/>
+                <a:ea typeface="Consolas"/>
+                <a:cs typeface="Consolas"/>
+              </a:rPr>
+              <a:t>ZEPHYR_BASE</a:t>
+            </a:r>
+            <a:r>
+              <a:rPr sz="1800" b="0" dirty="0">
+                <a:solidFill>
+                  <a:srgbClr val="B84E00"/>
+                </a:solidFill>
+                <a:latin typeface="Consolas"/>
+                <a:ea typeface="Consolas"/>
+                <a:cs typeface="Consolas"/>
+              </a:rPr>
+              <a:t>}</a:t>
+            </a:r>
+            <a:r>
+              <a:rPr sz="1800" b="0" dirty="0">
+                <a:solidFill>
+                  <a:srgbClr val="29263B"/>
+                </a:solidFill>
+                <a:latin typeface="Consolas"/>
+                <a:ea typeface="Consolas"/>
+                <a:cs typeface="Consolas"/>
+              </a:rPr>
+              <a:t>)</a:t>
             </a:r>
           </a:p>
           <a:p>
@@ -32447,7 +33060,7 @@
                 <a:ea typeface="Microsoft YaHei"/>
                 <a:cs typeface="Microsoft YaHei"/>
               </a:rPr>
-              <a:t> $ENV{</a:t>
+              <a:t> </a:t>
             </a:r>
             <a:r>
               <a:rPr sz="1950" b="0" dirty="0">
@@ -32458,18 +33071,40 @@
                 <a:ea typeface="Microsoft YaHei"/>
                 <a:cs typeface="Microsoft YaHei"/>
               </a:rPr>
+              <a:t>$ENV{</a:t>
+            </a:r>
+            <a:r>
+              <a:rPr sz="1950" b="0" dirty="0">
+                <a:solidFill>
+                  <a:srgbClr val="B84E00"/>
+                </a:solidFill>
+                <a:latin typeface="Microsoft YaHei"/>
+                <a:ea typeface="Microsoft YaHei"/>
+                <a:cs typeface="Microsoft YaHei"/>
+              </a:rPr>
               <a:t>ZEPHYR_BASE</a:t>
             </a:r>
             <a:r>
               <a:rPr sz="1950" b="0" dirty="0">
                 <a:solidFill>
-                  <a:srgbClr val="29263B"/>
-                </a:solidFill>
-                <a:latin typeface="Microsoft YaHei"/>
-                <a:ea typeface="Microsoft YaHei"/>
-                <a:cs typeface="Microsoft YaHei"/>
-              </a:rPr>
-              <a:t>} </a:t>
+                  <a:srgbClr val="B84E00"/>
+                </a:solidFill>
+                <a:latin typeface="Microsoft YaHei"/>
+                <a:ea typeface="Microsoft YaHei"/>
+                <a:cs typeface="Microsoft YaHei"/>
+              </a:rPr>
+              <a:t>}</a:t>
+            </a:r>
+            <a:r>
+              <a:rPr sz="1950" b="0" dirty="0">
+                <a:solidFill>
+                  <a:srgbClr val="29263B"/>
+                </a:solidFill>
+                <a:latin typeface="Microsoft YaHei"/>
+                <a:ea typeface="Microsoft YaHei"/>
+                <a:cs typeface="Microsoft YaHei"/>
+              </a:rPr>
+              <a:t> </a:t>
             </a:r>
             <a:r>
               <a:rPr sz="1950" b="0" dirty="0" err="1">
@@ -32560,7 +33195,19 @@
                 <a:cs typeface="Microsoft YaHei"/>
                 <a:hlinkClick r:id="rId3"/>
               </a:rPr>
-              <a:t>官方说明：doc/develop/application/index.rst</a:t>
+              <a:t>官方说明：</a:t>
+            </a:r>
+            <a:r>
+              <a:rPr sz="1275" b="0">
+                <a:solidFill>
+                  <a:srgbClr val="0070C0"/>
+                </a:solidFill>
+                <a:latin typeface="Microsoft YaHei"/>
+                <a:ea typeface="Microsoft YaHei"/>
+                <a:cs typeface="Microsoft YaHei"/>
+                <a:hlinkClick r:id="rId3"/>
+              </a:rPr>
+              <a:t>doc/develop/application/index.rst</a:t>
             </a:r>
           </a:p>
         </p:txBody>
@@ -32629,7 +33276,31 @@
                 <a:cs typeface="Microsoft YaHei"/>
                 <a:hlinkClick r:id="rId4"/>
               </a:rPr>
-              <a:t>实现定位：samples/hello_world/CMakeLists.txt · 3 行附近</a:t>
+              <a:t>实现定位：</a:t>
+            </a:r>
+            <a:r>
+              <a:rPr sz="1275" b="0">
+                <a:solidFill>
+                  <a:srgbClr val="0070C0"/>
+                </a:solidFill>
+                <a:latin typeface="Microsoft YaHei"/>
+                <a:ea typeface="Microsoft YaHei"/>
+                <a:cs typeface="Microsoft YaHei"/>
+                <a:hlinkClick r:id="rId4"/>
+              </a:rPr>
+              <a:t>samples/hello_world/CMakeLists.txt</a:t>
+            </a:r>
+            <a:r>
+              <a:rPr sz="1275" b="0">
+                <a:solidFill>
+                  <a:srgbClr val="397589"/>
+                </a:solidFill>
+                <a:latin typeface="Microsoft YaHei"/>
+                <a:ea typeface="Microsoft YaHei"/>
+                <a:cs typeface="Microsoft YaHei"/>
+                <a:hlinkClick r:id="rId4"/>
+              </a:rPr>
+              <a:t> · 3 行附近</a:t>
             </a:r>
           </a:p>
         </p:txBody>
@@ -33562,7 +34233,19 @@
                 <a:cs typeface="Microsoft YaHei"/>
                 <a:hlinkClick r:id="rId3"/>
               </a:rPr>
-              <a:t>官方说明：doc/build/cmake/index.rst</a:t>
+              <a:t>官方说明：</a:t>
+            </a:r>
+            <a:r>
+              <a:rPr sz="1275" b="0">
+                <a:solidFill>
+                  <a:srgbClr val="0070C0"/>
+                </a:solidFill>
+                <a:latin typeface="Microsoft YaHei"/>
+                <a:ea typeface="Microsoft YaHei"/>
+                <a:cs typeface="Microsoft YaHei"/>
+                <a:hlinkClick r:id="rId3"/>
+              </a:rPr>
+              <a:t>doc/build/cmake/index.rst</a:t>
             </a:r>
           </a:p>
         </p:txBody>
@@ -33631,7 +34314,31 @@
                 <a:cs typeface="Microsoft YaHei"/>
                 <a:hlinkClick r:id="rId4"/>
               </a:rPr>
-              <a:t>实现定位：cmake/modules/kernel.cmake · 236 行附近</a:t>
+              <a:t>实现定位：</a:t>
+            </a:r>
+            <a:r>
+              <a:rPr sz="1275" b="0">
+                <a:solidFill>
+                  <a:srgbClr val="0070C0"/>
+                </a:solidFill>
+                <a:latin typeface="Microsoft YaHei"/>
+                <a:ea typeface="Microsoft YaHei"/>
+                <a:cs typeface="Microsoft YaHei"/>
+                <a:hlinkClick r:id="rId4"/>
+              </a:rPr>
+              <a:t>cmake/modules/kernel.cmake</a:t>
+            </a:r>
+            <a:r>
+              <a:rPr sz="1275" b="0">
+                <a:solidFill>
+                  <a:srgbClr val="397589"/>
+                </a:solidFill>
+                <a:latin typeface="Microsoft YaHei"/>
+                <a:ea typeface="Microsoft YaHei"/>
+                <a:cs typeface="Microsoft YaHei"/>
+                <a:hlinkClick r:id="rId4"/>
+              </a:rPr>
+              <a:t> · 236 行附近</a:t>
             </a:r>
           </a:p>
         </p:txBody>
@@ -34959,7 +35666,19 @@
                 <a:cs typeface="Microsoft YaHei"/>
                 <a:hlinkClick r:id="rId3"/>
               </a:rPr>
-              <a:t>官方说明：doc/build/zephyr_cmake_package.rst</a:t>
+              <a:t>官方说明：</a:t>
+            </a:r>
+            <a:r>
+              <a:rPr sz="1275" b="0">
+                <a:solidFill>
+                  <a:srgbClr val="0070C0"/>
+                </a:solidFill>
+                <a:latin typeface="Microsoft YaHei"/>
+                <a:ea typeface="Microsoft YaHei"/>
+                <a:cs typeface="Microsoft YaHei"/>
+                <a:hlinkClick r:id="rId3"/>
+              </a:rPr>
+              <a:t>doc/build/zephyr_cmake_package.rst</a:t>
             </a:r>
           </a:p>
         </p:txBody>
@@ -35028,7 +35747,31 @@
                 <a:cs typeface="Microsoft YaHei"/>
                 <a:hlinkClick r:id="rId4"/>
               </a:rPr>
-              <a:t>实现定位：share/zephyr-package/cmake/ZephyrConfig.cmake · 28 行附近</a:t>
+              <a:t>实现定位：</a:t>
+            </a:r>
+            <a:r>
+              <a:rPr sz="1275" b="0">
+                <a:solidFill>
+                  <a:srgbClr val="0070C0"/>
+                </a:solidFill>
+                <a:latin typeface="Microsoft YaHei"/>
+                <a:ea typeface="Microsoft YaHei"/>
+                <a:cs typeface="Microsoft YaHei"/>
+                <a:hlinkClick r:id="rId4"/>
+              </a:rPr>
+              <a:t>share/zephyr-package/cmake/ZephyrConfig.cmake</a:t>
+            </a:r>
+            <a:r>
+              <a:rPr sz="1275" b="0">
+                <a:solidFill>
+                  <a:srgbClr val="397589"/>
+                </a:solidFill>
+                <a:latin typeface="Microsoft YaHei"/>
+                <a:ea typeface="Microsoft YaHei"/>
+                <a:cs typeface="Microsoft YaHei"/>
+                <a:hlinkClick r:id="rId4"/>
+              </a:rPr>
+              <a:t> · 28 行附近</a:t>
             </a:r>
           </a:p>
         </p:txBody>
@@ -35386,7 +36129,7 @@
                 <a:ea typeface="Microsoft YaHei"/>
                 <a:cs typeface="Microsoft YaHei"/>
               </a:rPr>
-              <a:t>3.</a:t>
+              <a:t>7.1.3</a:t>
             </a:r>
             <a:r>
               <a:rPr lang="en-US" sz="1575" b="0" dirty="0">
@@ -35397,7 +36140,7 @@
                 <a:ea typeface="Microsoft YaHei"/>
                 <a:cs typeface="Microsoft YaHei"/>
               </a:rPr>
-              <a:t>0</a:t>
+              <a:t/>
             </a:r>
             <a:r>
               <a:rPr sz="1575" b="0" dirty="0">
@@ -35408,7 +36151,7 @@
                 <a:ea typeface="Microsoft YaHei"/>
                 <a:cs typeface="Microsoft YaHei"/>
               </a:rPr>
-              <a:t> ·  </a:t>
+              <a:t> · </a:t>
             </a:r>
             <a:r>
               <a:rPr lang="zh-CN" altLang="en-US" sz="1575" b="0" dirty="0">
@@ -35777,7 +36520,7 @@
             <a:r>
               <a:rPr lang="en-US" sz="1875" b="1" dirty="0" err="1">
                 <a:solidFill>
-                  <a:srgbClr val="6845AC"/>
+                  <a:srgbClr val="0070C0"/>
                 </a:solidFill>
                 <a:latin typeface="Microsoft YaHei"/>
                 <a:ea typeface="Microsoft YaHei"/>
@@ -36274,7 +37017,7 @@
             <a:r>
               <a:rPr lang="en-US" altLang="zh-CN" sz="1875" b="1" dirty="0" err="1">
                 <a:solidFill>
-                  <a:srgbClr val="6845AC"/>
+                  <a:srgbClr val="0070C0"/>
                 </a:solidFill>
                 <a:latin typeface="Microsoft YaHei"/>
                 <a:ea typeface="Microsoft YaHei"/>
@@ -37433,7 +38176,19 @@
                 <a:cs typeface="Microsoft YaHei"/>
                 <a:hlinkClick r:id="rId3"/>
               </a:rPr>
-              <a:t>官方说明：doc/build/cmake/index.rst</a:t>
+              <a:t>官方说明：</a:t>
+            </a:r>
+            <a:r>
+              <a:rPr sz="1275" b="0">
+                <a:solidFill>
+                  <a:srgbClr val="0070C0"/>
+                </a:solidFill>
+                <a:latin typeface="Microsoft YaHei"/>
+                <a:ea typeface="Microsoft YaHei"/>
+                <a:cs typeface="Microsoft YaHei"/>
+                <a:hlinkClick r:id="rId3"/>
+              </a:rPr>
+              <a:t>doc/build/cmake/index.rst</a:t>
             </a:r>
           </a:p>
         </p:txBody>
@@ -37502,7 +38257,31 @@
                 <a:cs typeface="Microsoft YaHei"/>
                 <a:hlinkClick r:id="rId4"/>
               </a:rPr>
-              <a:t>实现定位：cmake/modules/zephyr_default.cmake · 71 行附近</a:t>
+              <a:t>实现定位：</a:t>
+            </a:r>
+            <a:r>
+              <a:rPr sz="1275" b="0">
+                <a:solidFill>
+                  <a:srgbClr val="0070C0"/>
+                </a:solidFill>
+                <a:latin typeface="Microsoft YaHei"/>
+                <a:ea typeface="Microsoft YaHei"/>
+                <a:cs typeface="Microsoft YaHei"/>
+                <a:hlinkClick r:id="rId4"/>
+              </a:rPr>
+              <a:t>cmake/modules/zephyr_default.cmake</a:t>
+            </a:r>
+            <a:r>
+              <a:rPr sz="1275" b="0">
+                <a:solidFill>
+                  <a:srgbClr val="397589"/>
+                </a:solidFill>
+                <a:latin typeface="Microsoft YaHei"/>
+                <a:ea typeface="Microsoft YaHei"/>
+                <a:cs typeface="Microsoft YaHei"/>
+                <a:hlinkClick r:id="rId4"/>
+              </a:rPr>
+              <a:t> · 71 行附近</a:t>
             </a:r>
           </a:p>
         </p:txBody>
@@ -38566,7 +39345,19 @@
                 <a:cs typeface="Microsoft YaHei"/>
                 <a:hlinkClick r:id="rId3"/>
               </a:rPr>
-              <a:t>官方说明：doc/build/cmake/index.rst</a:t>
+              <a:t>官方说明：</a:t>
+            </a:r>
+            <a:r>
+              <a:rPr sz="1275" b="0">
+                <a:solidFill>
+                  <a:srgbClr val="0070C0"/>
+                </a:solidFill>
+                <a:latin typeface="Microsoft YaHei"/>
+                <a:ea typeface="Microsoft YaHei"/>
+                <a:cs typeface="Microsoft YaHei"/>
+                <a:hlinkClick r:id="rId3"/>
+              </a:rPr>
+              <a:t>doc/build/cmake/index.rst</a:t>
             </a:r>
           </a:p>
         </p:txBody>
@@ -38635,7 +39426,31 @@
                 <a:cs typeface="Microsoft YaHei"/>
                 <a:hlinkClick r:id="rId4"/>
               </a:rPr>
-              <a:t>实现定位：cmake/modules/kernel.cmake · 236 行附近</a:t>
+              <a:t>实现定位：</a:t>
+            </a:r>
+            <a:r>
+              <a:rPr sz="1275" b="0">
+                <a:solidFill>
+                  <a:srgbClr val="0070C0"/>
+                </a:solidFill>
+                <a:latin typeface="Microsoft YaHei"/>
+                <a:ea typeface="Microsoft YaHei"/>
+                <a:cs typeface="Microsoft YaHei"/>
+                <a:hlinkClick r:id="rId4"/>
+              </a:rPr>
+              <a:t>cmake/modules/kernel.cmake</a:t>
+            </a:r>
+            <a:r>
+              <a:rPr sz="1275" b="0">
+                <a:solidFill>
+                  <a:srgbClr val="397589"/>
+                </a:solidFill>
+                <a:latin typeface="Microsoft YaHei"/>
+                <a:ea typeface="Microsoft YaHei"/>
+                <a:cs typeface="Microsoft YaHei"/>
+                <a:hlinkClick r:id="rId4"/>
+              </a:rPr>
+              <a:t> · 236 行附近</a:t>
             </a:r>
           </a:p>
         </p:txBody>
@@ -39240,7 +40055,7 @@
             <a:r>
               <a:rPr sz="1800" b="0" dirty="0">
                 <a:solidFill>
-                  <a:srgbClr val="29263B"/>
+                  <a:srgbClr val="646173"/>
                 </a:solidFill>
                 <a:latin typeface="Consolas"/>
                 <a:ea typeface="Consolas"/>
@@ -39251,7 +40066,7 @@
             <a:r>
               <a:rPr sz="1800" b="0" dirty="0" err="1">
                 <a:solidFill>
-                  <a:srgbClr val="29263B"/>
+                  <a:srgbClr val="646173"/>
                 </a:solidFill>
                 <a:latin typeface="Consolas"/>
                 <a:ea typeface="Consolas"/>
@@ -39262,7 +40077,7 @@
             <a:r>
               <a:rPr sz="1800" b="0" dirty="0">
                 <a:solidFill>
-                  <a:srgbClr val="29263B"/>
+                  <a:srgbClr val="646173"/>
                 </a:solidFill>
                 <a:latin typeface="Consolas"/>
                 <a:ea typeface="Consolas"/>
@@ -39416,7 +40231,7 @@
             <a:r>
               <a:rPr sz="1800" b="0" dirty="0">
                 <a:solidFill>
-                  <a:srgbClr val="29263B"/>
+                  <a:srgbClr val="646173"/>
                 </a:solidFill>
                 <a:latin typeface="Consolas"/>
                 <a:ea typeface="Consolas"/>
@@ -39427,7 +40242,7 @@
             <a:r>
               <a:rPr sz="1800" b="0" dirty="0" err="1">
                 <a:solidFill>
-                  <a:srgbClr val="29263B"/>
+                  <a:srgbClr val="646173"/>
                 </a:solidFill>
                 <a:latin typeface="Consolas"/>
                 <a:ea typeface="Consolas"/>
@@ -39438,7 +40253,7 @@
             <a:r>
               <a:rPr sz="1800" b="0" dirty="0">
                 <a:solidFill>
-                  <a:srgbClr val="29263B"/>
+                  <a:srgbClr val="646173"/>
                 </a:solidFill>
                 <a:latin typeface="Consolas"/>
                 <a:ea typeface="Consolas"/>
@@ -39520,7 +40335,51 @@
                 <a:ea typeface="Consolas"/>
                 <a:cs typeface="Consolas"/>
               </a:rPr>
-              <a:t> -m "$PWD")"</a:t>
+              <a:t> </a:t>
+            </a:r>
+            <a:r>
+              <a:rPr sz="1800" b="0" dirty="0">
+                <a:solidFill>
+                  <a:srgbClr val="B84E00"/>
+                </a:solidFill>
+                <a:latin typeface="Consolas"/>
+                <a:ea typeface="Consolas"/>
+                <a:cs typeface="Consolas"/>
+              </a:rPr>
+              <a:t>-m</a:t>
+            </a:r>
+            <a:r>
+              <a:rPr sz="1800" b="0" dirty="0">
+                <a:solidFill>
+                  <a:srgbClr val="29263B"/>
+                </a:solidFill>
+                <a:latin typeface="Consolas"/>
+                <a:ea typeface="Consolas"/>
+                <a:cs typeface="Consolas"/>
+              </a:rPr>
+              <a:t> "</a:t>
+            </a:r>
+            <a:r>
+              <a:rPr sz="1800" b="0" dirty="0">
+                <a:solidFill>
+                  <a:srgbClr val="B84E00"/>
+                </a:solidFill>
+                <a:latin typeface="Consolas"/>
+                <a:ea typeface="Consolas"/>
+                <a:cs typeface="Consolas"/>
+              </a:rPr>
+              <a:t>$PWD</a:t>
+            </a:r>
+            <a:r>
+              <a:rPr sz="1800" b="0" dirty="0">
+                <a:solidFill>
+                  <a:srgbClr val="29263B"/>
+                </a:solidFill>
+                <a:latin typeface="Consolas"/>
+                <a:ea typeface="Consolas"/>
+                <a:cs typeface="Consolas"/>
+              </a:rPr>
+              <a:t>")"</a:t>
             </a:r>
           </a:p>
         </p:txBody>
@@ -39660,7 +40519,16 @@
               <a:rPr u="sng">
                 <a:hlinkClick r:id="rId4"/>
               </a:rPr>
-              <a:t>源码定位：doc/develop/application/index.rst</a:t>
+              <a:t>源码定位：</a:t>
+            </a:r>
+            <a:r>
+              <a:rPr u="sng">
+                <a:solidFill>
+                  <a:srgbClr val="0070C0"/>
+                </a:solidFill>
+                <a:hlinkClick r:id="rId4"/>
+              </a:rPr>
+              <a:t>doc/develop/application/index.rst</a:t>
             </a:r>
           </a:p>
         </p:txBody>
@@ -40133,7 +41001,7 @@
             <a:r>
               <a:rPr sz="1800" b="0" dirty="0">
                 <a:solidFill>
-                  <a:srgbClr val="29263B"/>
+                  <a:srgbClr val="646173"/>
                 </a:solidFill>
                 <a:latin typeface="Consolas"/>
                 <a:ea typeface="Consolas"/>
@@ -40144,7 +41012,7 @@
             <a:r>
               <a:rPr sz="1800" b="0" dirty="0" err="1">
                 <a:solidFill>
-                  <a:srgbClr val="29263B"/>
+                  <a:srgbClr val="646173"/>
                 </a:solidFill>
                 <a:latin typeface="Consolas"/>
                 <a:ea typeface="Consolas"/>
@@ -40155,7 +41023,7 @@
             <a:r>
               <a:rPr sz="1800" b="0" dirty="0">
                 <a:solidFill>
-                  <a:srgbClr val="29263B"/>
+                  <a:srgbClr val="646173"/>
                 </a:solidFill>
                 <a:latin typeface="Consolas"/>
                 <a:ea typeface="Consolas"/>
@@ -40166,7 +41034,7 @@
             <a:r>
               <a:rPr dirty="0">
                 <a:solidFill>
-                  <a:srgbClr val="B84E00"/>
+                  <a:srgbClr val="646173"/>
                 </a:solidFill>
               </a:rPr>
               <a:t>ZEPHYR_BASE</a:t>
@@ -40174,7 +41042,7 @@
             <a:r>
               <a:rPr sz="1800" b="0" dirty="0">
                 <a:solidFill>
-                  <a:srgbClr val="29263B"/>
+                  <a:srgbClr val="646173"/>
                 </a:solidFill>
                 <a:latin typeface="Consolas"/>
                 <a:ea typeface="Consolas"/>
@@ -40473,81 +41341,73 @@
                 <a:ea typeface="Consolas"/>
                 <a:cs typeface="Consolas"/>
               </a:rPr>
-              <a:t>=$</a:t>
-            </a:r>
-            <a:r>
-              <a:rPr dirty="0">
+              <a:t>=</a:t>
+            </a:r>
+            <a:r>
+              <a:rPr sz="1800" b="0" dirty="0">
                 <a:solidFill>
                   <a:srgbClr val="B84E00"/>
-                </a:solidFill>
-              </a:rPr>
-              <a:t>ZEPHYR_BASE</a:t>
-            </a:r>
-            <a:r>
-              <a:rPr dirty="0">
-                <a:solidFill>
-                  <a:srgbClr val="0070C0"/>
-                </a:solidFill>
-              </a:rPr>
-              <a:t>/share/zephyr-package/</a:t>
-            </a:r>
-            <a:r>
-              <a:rPr dirty="0" err="1">
-                <a:solidFill>
-                  <a:srgbClr val="0070C0"/>
-                </a:solidFill>
-              </a:rPr>
-              <a:t>cmake</a:t>
-            </a:r>
-            <a:r>
-              <a:rPr sz="1800" b="0" dirty="0">
-                <a:solidFill>
-                  <a:srgbClr val="29263B"/>
                 </a:solidFill>
                 <a:latin typeface="Consolas"/>
                 <a:ea typeface="Consolas"/>
                 <a:cs typeface="Consolas"/>
               </a:rPr>
-              <a:t>" \</a:t>
-            </a:r>
-          </a:p>
-          <a:p>
-            <a:pPr>
-              <a:lnSpc>
-                <a:spcPct val="120000"/>
-              </a:lnSpc>
-              <a:spcAft>
-                <a:spcPts val="0"/>
-              </a:spcAft>
-              <a:buNone/>
-              <a:defRPr sz="1800" b="0">
+              <a:t>$</a:t>
+            </a:r>
+            <a:r>
+              <a:rPr dirty="0">
+                <a:solidFill>
+                  <a:srgbClr val="B84E00"/>
+                </a:solidFill>
+              </a:rPr>
+              <a:t>ZEPHYR_BASE</a:t>
+            </a:r>
+            <a:r>
+              <a:rPr dirty="0">
+                <a:solidFill>
+                  <a:srgbClr val="0070C0"/>
+                </a:solidFill>
+              </a:rPr>
+              <a:t>/share/zephyr-package/</a:t>
+            </a:r>
+            <a:r>
+              <a:rPr dirty="0" err="1">
+                <a:solidFill>
+                  <a:srgbClr val="0070C0"/>
+                </a:solidFill>
+              </a:rPr>
+              <a:t>cmake</a:t>
+            </a:r>
+            <a:r>
+              <a:rPr sz="1800" b="0" dirty="0">
                 <a:solidFill>
                   <a:srgbClr val="29263B"/>
                 </a:solidFill>
                 <a:latin typeface="Consolas"/>
                 <a:ea typeface="Consolas"/>
                 <a:cs typeface="Consolas"/>
-              </a:defRPr>
-            </a:pPr>
-            <a:r>
-              <a:rPr sz="1800" b="0" dirty="0">
+              </a:rPr>
+              <a:t>" \</a:t>
+            </a:r>
+          </a:p>
+          <a:p>
+            <a:pPr>
+              <a:lnSpc>
+                <a:spcPct val="120000"/>
+              </a:lnSpc>
+              <a:spcAft>
+                <a:spcPts val="0"/>
+              </a:spcAft>
+              <a:buNone/>
+              <a:defRPr sz="1800" b="0">
                 <a:solidFill>
                   <a:srgbClr val="29263B"/>
                 </a:solidFill>
                 <a:latin typeface="Consolas"/>
                 <a:ea typeface="Consolas"/>
                 <a:cs typeface="Consolas"/>
-              </a:rPr>
-              <a:t>  "</a:t>
-            </a:r>
-            <a:r>
-              <a:rPr dirty="0">
-                <a:solidFill>
-                  <a:srgbClr val="B84E00"/>
-                </a:solidFill>
-              </a:rPr>
-              <a:t>-DPython3_EXECUTABLE</a:t>
-            </a:r>
+              </a:defRPr>
+            </a:pPr>
             <a:r>
               <a:rPr sz="1800" b="0" dirty="0">
                 <a:solidFill>
@@ -40557,15 +41417,15 @@
                 <a:ea typeface="Consolas"/>
                 <a:cs typeface="Consolas"/>
               </a:rPr>
-              <a:t>=$(</a:t>
-            </a:r>
-            <a:r>
-              <a:rPr dirty="0" err="1">
-                <a:solidFill>
-                  <a:srgbClr val="A02B93"/>
-                </a:solidFill>
-              </a:rPr>
-              <a:t>cygpath</a:t>
+              <a:t>  "</a:t>
+            </a:r>
+            <a:r>
+              <a:rPr dirty="0">
+                <a:solidFill>
+                  <a:srgbClr val="B84E00"/>
+                </a:solidFill>
+              </a:rPr>
+              <a:t>-DPython3_EXECUTABLE</a:t>
             </a:r>
             <a:r>
               <a:rPr sz="1800" b="0" dirty="0">
@@ -40576,7 +41436,114 @@
                 <a:ea typeface="Consolas"/>
                 <a:cs typeface="Consolas"/>
               </a:rPr>
-              <a:t> -m "$(command -v python)")"</a:t>
+              <a:t>=$(</a:t>
+            </a:r>
+            <a:r>
+              <a:rPr dirty="0" err="1">
+                <a:solidFill>
+                  <a:srgbClr val="A02B93"/>
+                </a:solidFill>
+              </a:rPr>
+              <a:t>cygpath</a:t>
+            </a:r>
+            <a:r>
+              <a:rPr sz="1800" b="0" dirty="0">
+                <a:solidFill>
+                  <a:srgbClr val="29263B"/>
+                </a:solidFill>
+                <a:latin typeface="Consolas"/>
+                <a:ea typeface="Consolas"/>
+                <a:cs typeface="Consolas"/>
+              </a:rPr>
+              <a:t> </a:t>
+            </a:r>
+            <a:r>
+              <a:rPr sz="1800" b="0" dirty="0">
+                <a:solidFill>
+                  <a:srgbClr val="B84E00"/>
+                </a:solidFill>
+                <a:latin typeface="Consolas"/>
+                <a:ea typeface="Consolas"/>
+                <a:cs typeface="Consolas"/>
+              </a:rPr>
+              <a:t>-m</a:t>
+            </a:r>
+            <a:r>
+              <a:rPr sz="1800" b="0" dirty="0">
+                <a:solidFill>
+                  <a:srgbClr val="29263B"/>
+                </a:solidFill>
+                <a:latin typeface="Consolas"/>
+                <a:ea typeface="Consolas"/>
+                <a:cs typeface="Consolas"/>
+              </a:rPr>
+              <a:t> "$(</a:t>
+            </a:r>
+            <a:r>
+              <a:rPr sz="1800" b="0" dirty="0">
+                <a:solidFill>
+                  <a:srgbClr val="A02B93"/>
+                </a:solidFill>
+                <a:latin typeface="Consolas"/>
+                <a:ea typeface="Consolas"/>
+                <a:cs typeface="Consolas"/>
+              </a:rPr>
+              <a:t>command</a:t>
+            </a:r>
+            <a:r>
+              <a:rPr sz="1800" b="0" dirty="0">
+                <a:solidFill>
+                  <a:srgbClr val="29263B"/>
+                </a:solidFill>
+                <a:latin typeface="Consolas"/>
+                <a:ea typeface="Consolas"/>
+                <a:cs typeface="Consolas"/>
+              </a:rPr>
+              <a:t> </a:t>
+            </a:r>
+            <a:r>
+              <a:rPr sz="1800" b="0" dirty="0">
+                <a:solidFill>
+                  <a:srgbClr val="B84E00"/>
+                </a:solidFill>
+                <a:latin typeface="Consolas"/>
+                <a:ea typeface="Consolas"/>
+                <a:cs typeface="Consolas"/>
+              </a:rPr>
+              <a:t>-v</a:t>
+            </a:r>
+            <a:r>
+              <a:rPr sz="1800" b="0" dirty="0">
+                <a:solidFill>
+                  <a:srgbClr val="29263B"/>
+                </a:solidFill>
+                <a:latin typeface="Consolas"/>
+                <a:ea typeface="Consolas"/>
+                <a:cs typeface="Consolas"/>
+              </a:rPr>
+              <a:t> </a:t>
+            </a:r>
+            <a:r>
+              <a:rPr sz="1800" b="0" dirty="0">
+                <a:solidFill>
+                  <a:srgbClr val="A02B93"/>
+                </a:solidFill>
+                <a:latin typeface="Consolas"/>
+                <a:ea typeface="Consolas"/>
+                <a:cs typeface="Consolas"/>
+              </a:rPr>
+              <a:t>python</a:t>
+            </a:r>
+            <a:r>
+              <a:rPr sz="1800" b="0" dirty="0">
+                <a:solidFill>
+                  <a:srgbClr val="29263B"/>
+                </a:solidFill>
+                <a:latin typeface="Consolas"/>
+                <a:ea typeface="Consolas"/>
+                <a:cs typeface="Consolas"/>
+              </a:rPr>
+              <a:t>)")"</a:t>
             </a:r>
           </a:p>
         </p:txBody>
@@ -40820,7 +41787,15 @@
                   <a:srgbClr val="B84E00"/>
                 </a:solidFill>
               </a:rPr>
-              <a:t>-G Ninja</a:t>
+              <a:t>-G</a:t>
+            </a:r>
+            <a:r>
+              <a:rPr dirty="0">
+                <a:solidFill>
+                  <a:srgbClr val="B84E00"/>
+                </a:solidFill>
+              </a:rPr>
+              <a:t> Ninja</a:t>
             </a:r>
             <a:r>
               <a:rPr sz="1950" b="0" dirty="0">
@@ -41124,7 +42099,16 @@
               <a:rPr u="sng">
                 <a:hlinkClick r:id="rId4"/>
               </a:rPr>
-              <a:t>源码定位：doc/develop/application/index.rst</a:t>
+              <a:t>源码定位：</a:t>
+            </a:r>
+            <a:r>
+              <a:rPr u="sng">
+                <a:solidFill>
+                  <a:srgbClr val="0070C0"/>
+                </a:solidFill>
+                <a:hlinkClick r:id="rId4"/>
+              </a:rPr>
+              <a:t>doc/develop/application/index.rst</a:t>
             </a:r>
           </a:p>
         </p:txBody>
